--- a/Power point/ppt1.pptx
+++ b/Power point/ppt1.pptx
@@ -5,7 +5,7 @@
     <p:sldMasterId id="2147483648" r:id="rId1"/>
   </p:sldMasterIdLst>
   <p:notesMasterIdLst>
-    <p:notesMasterId r:id="rId22"/>
+    <p:notesMasterId r:id="rId23"/>
   </p:notesMasterIdLst>
   <p:sldIdLst>
     <p:sldId id="256" r:id="rId2"/>
@@ -15,39 +15,40 @@
     <p:sldId id="259" r:id="rId6"/>
     <p:sldId id="273" r:id="rId7"/>
     <p:sldId id="274" r:id="rId8"/>
-    <p:sldId id="261" r:id="rId9"/>
-    <p:sldId id="275" r:id="rId10"/>
-    <p:sldId id="276" r:id="rId11"/>
-    <p:sldId id="280" r:id="rId12"/>
-    <p:sldId id="279" r:id="rId13"/>
-    <p:sldId id="283" r:id="rId14"/>
-    <p:sldId id="284" r:id="rId15"/>
-    <p:sldId id="285" r:id="rId16"/>
-    <p:sldId id="281" r:id="rId17"/>
-    <p:sldId id="278" r:id="rId18"/>
-    <p:sldId id="286" r:id="rId19"/>
-    <p:sldId id="287" r:id="rId20"/>
-    <p:sldId id="263" r:id="rId21"/>
+    <p:sldId id="288" r:id="rId9"/>
+    <p:sldId id="261" r:id="rId10"/>
+    <p:sldId id="275" r:id="rId11"/>
+    <p:sldId id="276" r:id="rId12"/>
+    <p:sldId id="280" r:id="rId13"/>
+    <p:sldId id="279" r:id="rId14"/>
+    <p:sldId id="283" r:id="rId15"/>
+    <p:sldId id="284" r:id="rId16"/>
+    <p:sldId id="285" r:id="rId17"/>
+    <p:sldId id="281" r:id="rId18"/>
+    <p:sldId id="278" r:id="rId19"/>
+    <p:sldId id="286" r:id="rId20"/>
+    <p:sldId id="287" r:id="rId21"/>
+    <p:sldId id="263" r:id="rId22"/>
   </p:sldIdLst>
   <p:sldSz cx="18288000" cy="10287000"/>
   <p:notesSz cx="6858000" cy="9144000"/>
   <p:embeddedFontLst>
     <p:embeddedFont>
       <p:font typeface="Consolas" panose="020B0609020204030204" pitchFamily="49" charset="0"/>
-      <p:regular r:id="rId23"/>
-      <p:bold r:id="rId24"/>
-      <p:italic r:id="rId25"/>
-      <p:boldItalic r:id="rId26"/>
+      <p:regular r:id="rId24"/>
+      <p:bold r:id="rId25"/>
+      <p:italic r:id="rId26"/>
+      <p:boldItalic r:id="rId27"/>
     </p:embeddedFont>
     <p:embeddedFont>
       <p:font typeface="Josefin Sans" pitchFamily="2" charset="0"/>
-      <p:regular r:id="rId27"/>
-      <p:bold r:id="rId28"/>
+      <p:regular r:id="rId28"/>
+      <p:bold r:id="rId29"/>
     </p:embeddedFont>
     <p:embeddedFont>
       <p:font typeface="Josefin Sans Bold" pitchFamily="2" charset="0"/>
-      <p:regular r:id="rId29"/>
-      <p:boldItalic r:id="rId30"/>
+      <p:regular r:id="rId30"/>
+      <p:boldItalic r:id="rId31"/>
     </p:embeddedFont>
   </p:embeddedFontLst>
   <p:defaultTextStyle>
@@ -246,7 +247,7 @@
           <a:p>
             <a:fld id="{D806570B-5AAC-454B-A849-82385A756261}" type="datetimeFigureOut">
               <a:rPr lang="en-US" smtClean="0"/>
-              <a:t>12/14/2024</a:t>
+              <a:t>12/15/2024</a:t>
             </a:fld>
             <a:endParaRPr lang="en-US"/>
           </a:p>
@@ -597,6 +598,114 @@
 </p:notes>
 </file>
 
+<file path=ppt/notesSlides/notesSlide2.xml><?xml version="1.0" encoding="utf-8"?>
+<p:notes xmlns:a="http://schemas.openxmlformats.org/drawingml/2006/main" xmlns:r="http://schemas.openxmlformats.org/officeDocument/2006/relationships" xmlns:p="http://schemas.openxmlformats.org/presentationml/2006/main">
+  <p:cSld>
+    <p:spTree>
+      <p:nvGrpSpPr>
+        <p:cNvPr id="1" name="">
+          <a:extLst>
+            <a:ext uri="{FF2B5EF4-FFF2-40B4-BE49-F238E27FC236}">
+              <a16:creationId xmlns:a16="http://schemas.microsoft.com/office/drawing/2014/main" id="{082AC533-151F-5095-1B3D-5F828E0C688C}"/>
+            </a:ext>
+          </a:extLst>
+        </p:cNvPr>
+        <p:cNvGrpSpPr/>
+        <p:nvPr/>
+      </p:nvGrpSpPr>
+      <p:grpSpPr>
+        <a:xfrm>
+          <a:off x="0" y="0"/>
+          <a:ext cx="0" cy="0"/>
+          <a:chOff x="0" y="0"/>
+          <a:chExt cx="0" cy="0"/>
+        </a:xfrm>
+      </p:grpSpPr>
+      <p:sp>
+        <p:nvSpPr>
+          <p:cNvPr id="2" name="Slide Image Placeholder 1">
+            <a:extLst>
+              <a:ext uri="{FF2B5EF4-FFF2-40B4-BE49-F238E27FC236}">
+                <a16:creationId xmlns:a16="http://schemas.microsoft.com/office/drawing/2014/main" id="{D9C68990-E950-2AEB-0D91-E0A3FCC24C99}"/>
+              </a:ext>
+            </a:extLst>
+          </p:cNvPr>
+          <p:cNvSpPr>
+            <a:spLocks noGrp="1" noRot="1" noChangeAspect="1"/>
+          </p:cNvSpPr>
+          <p:nvPr>
+            <p:ph type="sldImg"/>
+          </p:nvPr>
+        </p:nvSpPr>
+        <p:spPr/>
+      </p:sp>
+      <p:sp>
+        <p:nvSpPr>
+          <p:cNvPr id="3" name="Notes Placeholder 2">
+            <a:extLst>
+              <a:ext uri="{FF2B5EF4-FFF2-40B4-BE49-F238E27FC236}">
+                <a16:creationId xmlns:a16="http://schemas.microsoft.com/office/drawing/2014/main" id="{CECA0847-93C3-621F-C545-2F04BACEE076}"/>
+              </a:ext>
+            </a:extLst>
+          </p:cNvPr>
+          <p:cNvSpPr>
+            <a:spLocks noGrp="1"/>
+          </p:cNvSpPr>
+          <p:nvPr>
+            <p:ph type="body" idx="1"/>
+          </p:nvPr>
+        </p:nvSpPr>
+        <p:spPr/>
+        <p:txBody>
+          <a:bodyPr/>
+          <a:lstStyle/>
+          <a:p>
+            <a:endParaRPr lang="en-US" dirty="0"/>
+          </a:p>
+        </p:txBody>
+      </p:sp>
+      <p:sp>
+        <p:nvSpPr>
+          <p:cNvPr id="4" name="Slide Number Placeholder 3">
+            <a:extLst>
+              <a:ext uri="{FF2B5EF4-FFF2-40B4-BE49-F238E27FC236}">
+                <a16:creationId xmlns:a16="http://schemas.microsoft.com/office/drawing/2014/main" id="{F1408A96-BB15-ED63-F765-BDDEB9E7C285}"/>
+              </a:ext>
+            </a:extLst>
+          </p:cNvPr>
+          <p:cNvSpPr>
+            <a:spLocks noGrp="1"/>
+          </p:cNvSpPr>
+          <p:nvPr>
+            <p:ph type="sldNum" sz="quarter" idx="10"/>
+          </p:nvPr>
+        </p:nvSpPr>
+        <p:spPr/>
+        <p:txBody>
+          <a:bodyPr/>
+          <a:lstStyle/>
+          <a:p>
+            <a:fld id="{9451115A-E810-4DC1-902C-A626DFA106F4}" type="slidenum">
+              <a:rPr lang="en-US" smtClean="0"/>
+              <a:t>8</a:t>
+            </a:fld>
+            <a:endParaRPr lang="en-US"/>
+          </a:p>
+        </p:txBody>
+      </p:sp>
+    </p:spTree>
+    <p:extLst>
+      <p:ext uri="{BB962C8B-B14F-4D97-AF65-F5344CB8AC3E}">
+        <p14:creationId xmlns:p14="http://schemas.microsoft.com/office/powerpoint/2010/main" val="2921610499"/>
+      </p:ext>
+    </p:extLst>
+  </p:cSld>
+  <p:clrMapOvr>
+    <a:masterClrMapping/>
+  </p:clrMapOvr>
+</p:notes>
+</file>
+
 <file path=ppt/slideLayouts/slideLayout1.xml><?xml version="1.0" encoding="utf-8"?>
 <p:sldLayout xmlns:a="http://schemas.openxmlformats.org/drawingml/2006/main" xmlns:r="http://schemas.openxmlformats.org/officeDocument/2006/relationships" xmlns:p="http://schemas.openxmlformats.org/presentationml/2006/main" type="title" preserve="1">
   <p:cSld name="Title Slide">
@@ -777,7 +886,7 @@
             <a:fld id="{1D8BD707-D9CF-40AE-B4C6-C98DA3205C09}" type="datetimeFigureOut">
               <a:rPr lang="en-US" smtClean="0"/>
               <a:pPr/>
-              <a:t>12/14/2024</a:t>
+              <a:t>12/15/2024</a:t>
             </a:fld>
             <a:endParaRPr lang="en-US"/>
           </a:p>
@@ -942,7 +1051,7 @@
             <a:fld id="{1D8BD707-D9CF-40AE-B4C6-C98DA3205C09}" type="datetimeFigureOut">
               <a:rPr lang="en-US" smtClean="0"/>
               <a:pPr/>
-              <a:t>12/14/2024</a:t>
+              <a:t>12/15/2024</a:t>
             </a:fld>
             <a:endParaRPr lang="en-US"/>
           </a:p>
@@ -1117,7 +1226,7 @@
             <a:fld id="{1D8BD707-D9CF-40AE-B4C6-C98DA3205C09}" type="datetimeFigureOut">
               <a:rPr lang="en-US" smtClean="0"/>
               <a:pPr/>
-              <a:t>12/14/2024</a:t>
+              <a:t>12/15/2024</a:t>
             </a:fld>
             <a:endParaRPr lang="en-US"/>
           </a:p>
@@ -1282,7 +1391,7 @@
             <a:fld id="{1D8BD707-D9CF-40AE-B4C6-C98DA3205C09}" type="datetimeFigureOut">
               <a:rPr lang="en-US" smtClean="0"/>
               <a:pPr/>
-              <a:t>12/14/2024</a:t>
+              <a:t>12/15/2024</a:t>
             </a:fld>
             <a:endParaRPr lang="en-US"/>
           </a:p>
@@ -1524,7 +1633,7 @@
             <a:fld id="{1D8BD707-D9CF-40AE-B4C6-C98DA3205C09}" type="datetimeFigureOut">
               <a:rPr lang="en-US" smtClean="0"/>
               <a:pPr/>
-              <a:t>12/14/2024</a:t>
+              <a:t>12/15/2024</a:t>
             </a:fld>
             <a:endParaRPr lang="en-US"/>
           </a:p>
@@ -1806,7 +1915,7 @@
             <a:fld id="{1D8BD707-D9CF-40AE-B4C6-C98DA3205C09}" type="datetimeFigureOut">
               <a:rPr lang="en-US" smtClean="0"/>
               <a:pPr/>
-              <a:t>12/14/2024</a:t>
+              <a:t>12/15/2024</a:t>
             </a:fld>
             <a:endParaRPr lang="en-US"/>
           </a:p>
@@ -2222,7 +2331,7 @@
             <a:fld id="{1D8BD707-D9CF-40AE-B4C6-C98DA3205C09}" type="datetimeFigureOut">
               <a:rPr lang="en-US" smtClean="0"/>
               <a:pPr/>
-              <a:t>12/14/2024</a:t>
+              <a:t>12/15/2024</a:t>
             </a:fld>
             <a:endParaRPr lang="en-US"/>
           </a:p>
@@ -2336,7 +2445,7 @@
             <a:fld id="{1D8BD707-D9CF-40AE-B4C6-C98DA3205C09}" type="datetimeFigureOut">
               <a:rPr lang="en-US" smtClean="0"/>
               <a:pPr/>
-              <a:t>12/14/2024</a:t>
+              <a:t>12/15/2024</a:t>
             </a:fld>
             <a:endParaRPr lang="en-US"/>
           </a:p>
@@ -2428,7 +2537,7 @@
             <a:fld id="{1D8BD707-D9CF-40AE-B4C6-C98DA3205C09}" type="datetimeFigureOut">
               <a:rPr lang="en-US" smtClean="0"/>
               <a:pPr/>
-              <a:t>12/14/2024</a:t>
+              <a:t>12/15/2024</a:t>
             </a:fld>
             <a:endParaRPr lang="en-US"/>
           </a:p>
@@ -2700,7 +2809,7 @@
             <a:fld id="{1D8BD707-D9CF-40AE-B4C6-C98DA3205C09}" type="datetimeFigureOut">
               <a:rPr lang="en-US" smtClean="0"/>
               <a:pPr/>
-              <a:t>12/14/2024</a:t>
+              <a:t>12/15/2024</a:t>
             </a:fld>
             <a:endParaRPr lang="en-US"/>
           </a:p>
@@ -2949,7 +3058,7 @@
             <a:fld id="{1D8BD707-D9CF-40AE-B4C6-C98DA3205C09}" type="datetimeFigureOut">
               <a:rPr lang="en-US" smtClean="0"/>
               <a:pPr/>
-              <a:t>12/14/2024</a:t>
+              <a:t>12/15/2024</a:t>
             </a:fld>
             <a:endParaRPr lang="en-US"/>
           </a:p>
@@ -3157,7 +3266,7 @@
             <a:fld id="{1D8BD707-D9CF-40AE-B4C6-C98DA3205C09}" type="datetimeFigureOut">
               <a:rPr lang="en-US" smtClean="0"/>
               <a:pPr/>
-              <a:t>12/14/2024</a:t>
+              <a:t>12/15/2024</a:t>
             </a:fld>
             <a:endParaRPr lang="en-US"/>
           </a:p>
@@ -4088,6 +4197,273 @@
         <p:cNvPr id="1" name="">
           <a:extLst>
             <a:ext uri="{FF2B5EF4-FFF2-40B4-BE49-F238E27FC236}">
+              <a16:creationId xmlns:a16="http://schemas.microsoft.com/office/drawing/2014/main" id="{C457255F-02B5-B499-2391-B451EC9A83A1}"/>
+            </a:ext>
+          </a:extLst>
+        </p:cNvPr>
+        <p:cNvGrpSpPr/>
+        <p:nvPr/>
+      </p:nvGrpSpPr>
+      <p:grpSpPr>
+        <a:xfrm>
+          <a:off x="0" y="0"/>
+          <a:ext cx="0" cy="0"/>
+          <a:chOff x="0" y="0"/>
+          <a:chExt cx="0" cy="0"/>
+        </a:xfrm>
+      </p:grpSpPr>
+      <p:grpSp>
+        <p:nvGrpSpPr>
+          <p:cNvPr id="2" name="Group 2">
+            <a:extLst>
+              <a:ext uri="{FF2B5EF4-FFF2-40B4-BE49-F238E27FC236}">
+                <a16:creationId xmlns:a16="http://schemas.microsoft.com/office/drawing/2014/main" id="{B13CB768-D8DC-6984-09CD-93775B44B526}"/>
+              </a:ext>
+            </a:extLst>
+          </p:cNvPr>
+          <p:cNvGrpSpPr/>
+          <p:nvPr/>
+        </p:nvGrpSpPr>
+        <p:grpSpPr>
+          <a:xfrm>
+            <a:off x="1028699" y="1731585"/>
+            <a:ext cx="7658101" cy="7197011"/>
+            <a:chOff x="-1" y="66675"/>
+            <a:chExt cx="10210800" cy="7404838"/>
+          </a:xfrm>
+        </p:grpSpPr>
+        <p:sp>
+          <p:nvSpPr>
+            <p:cNvPr id="3" name="TextBox 3">
+              <a:extLst>
+                <a:ext uri="{FF2B5EF4-FFF2-40B4-BE49-F238E27FC236}">
+                  <a16:creationId xmlns:a16="http://schemas.microsoft.com/office/drawing/2014/main" id="{652705A5-52BF-939F-34CC-A07368E7CF5C}"/>
+                </a:ext>
+              </a:extLst>
+            </p:cNvPr>
+            <p:cNvSpPr txBox="1"/>
+            <p:nvPr/>
+          </p:nvSpPr>
+          <p:spPr>
+            <a:xfrm>
+              <a:off x="0" y="66675"/>
+              <a:ext cx="10210799" cy="1800368"/>
+            </a:xfrm>
+            <a:prstGeom prst="rect">
+              <a:avLst/>
+            </a:prstGeom>
+          </p:spPr>
+          <p:txBody>
+            <a:bodyPr wrap="square" lIns="0" tIns="0" rIns="0" bIns="0" rtlCol="0" anchor="t">
+              <a:spAutoFit/>
+            </a:bodyPr>
+            <a:lstStyle/>
+            <a:p>
+              <a:pPr algn="just">
+                <a:lnSpc>
+                  <a:spcPts val="6720"/>
+                </a:lnSpc>
+              </a:pPr>
+              <a:r>
+                <a:rPr lang="id-ID" sz="6400" b="1" dirty="0">
+                  <a:solidFill>
+                    <a:srgbClr val="F7B4A7"/>
+                  </a:solidFill>
+                  <a:latin typeface="Josefin Sans Bold"/>
+                  <a:ea typeface="Josefin Sans Bold"/>
+                  <a:cs typeface="Josefin Sans Bold"/>
+                  <a:sym typeface="Josefin Sans Bold"/>
+                </a:rPr>
+                <a:t>Pengertian Pengadaan Barang</a:t>
+              </a:r>
+              <a:endParaRPr lang="en-US" sz="6400" b="1" dirty="0">
+                <a:solidFill>
+                  <a:srgbClr val="F7B4A7"/>
+                </a:solidFill>
+                <a:latin typeface="Josefin Sans Bold"/>
+                <a:ea typeface="Josefin Sans Bold"/>
+                <a:cs typeface="Josefin Sans Bold"/>
+                <a:sym typeface="Josefin Sans Bold"/>
+              </a:endParaRPr>
+            </a:p>
+          </p:txBody>
+        </p:sp>
+        <p:sp>
+          <p:nvSpPr>
+            <p:cNvPr id="5" name="TextBox 5">
+              <a:extLst>
+                <a:ext uri="{FF2B5EF4-FFF2-40B4-BE49-F238E27FC236}">
+                  <a16:creationId xmlns:a16="http://schemas.microsoft.com/office/drawing/2014/main" id="{886ABE53-9EF4-257A-FA07-D3FB11F201AD}"/>
+                </a:ext>
+              </a:extLst>
+            </p:cNvPr>
+            <p:cNvSpPr txBox="1"/>
+            <p:nvPr/>
+          </p:nvSpPr>
+          <p:spPr>
+            <a:xfrm>
+              <a:off x="-1" y="2602801"/>
+              <a:ext cx="10210800" cy="4868712"/>
+            </a:xfrm>
+            <a:prstGeom prst="rect">
+              <a:avLst/>
+            </a:prstGeom>
+          </p:spPr>
+          <p:txBody>
+            <a:bodyPr wrap="square" lIns="0" tIns="0" rIns="0" bIns="0" rtlCol="0" anchor="t">
+              <a:spAutoFit/>
+            </a:bodyPr>
+            <a:lstStyle/>
+            <a:p>
+              <a:pPr algn="just">
+                <a:lnSpc>
+                  <a:spcPts val="4060"/>
+                </a:lnSpc>
+              </a:pPr>
+              <a:r>
+                <a:rPr lang="id-ID" sz="3200" dirty="0">
+                  <a:solidFill>
+                    <a:srgbClr val="94DDDE"/>
+                  </a:solidFill>
+                  <a:latin typeface="Josefin Sans" panose="020B0604020202020204" charset="0"/>
+                </a:rPr>
+                <a:t>Menurut Putri dan Sembiring (2021)</a:t>
+              </a:r>
+              <a:endParaRPr lang="en-US" sz="3200" dirty="0">
+                <a:solidFill>
+                  <a:srgbClr val="94DDDE"/>
+                </a:solidFill>
+                <a:latin typeface="Josefin Sans" panose="020B0604020202020204" charset="0"/>
+              </a:endParaRPr>
+            </a:p>
+            <a:p>
+              <a:pPr algn="just">
+                <a:lnSpc>
+                  <a:spcPts val="4060"/>
+                </a:lnSpc>
+              </a:pPr>
+              <a:endParaRPr lang="en-US" sz="3200" dirty="0">
+                <a:solidFill>
+                  <a:srgbClr val="94DDDE"/>
+                </a:solidFill>
+                <a:latin typeface="Josefin Sans" panose="020B0604020202020204" charset="0"/>
+                <a:ea typeface="Josefin Sans"/>
+                <a:cs typeface="Josefin Sans"/>
+                <a:sym typeface="Josefin Sans"/>
+              </a:endParaRPr>
+            </a:p>
+            <a:p>
+              <a:pPr algn="just">
+                <a:lnSpc>
+                  <a:spcPts val="4060"/>
+                </a:lnSpc>
+              </a:pPr>
+              <a:r>
+                <a:rPr lang="id-ID" sz="3200" dirty="0">
+                  <a:solidFill>
+                    <a:srgbClr val="94DDDE"/>
+                  </a:solidFill>
+                </a:rPr>
+                <a:t>Pengadaan barang adalah proses pembelian atau penyediaan barang dan jasa yang dibutuhkan oleh suatu organisasi. Proses ini melibatkan identifikasi kebutuhan, pemilihan pemasok, dan pengelolaan pengiriman barang dengan tujuan efisiensi dan penghematan biaya</a:t>
+              </a:r>
+              <a:r>
+                <a:rPr lang="en-US" sz="3200" dirty="0">
+                  <a:solidFill>
+                    <a:srgbClr val="94DDDE"/>
+                  </a:solidFill>
+                </a:rPr>
+                <a:t>.</a:t>
+              </a:r>
+              <a:endParaRPr lang="en-US" sz="2900" dirty="0">
+                <a:solidFill>
+                  <a:srgbClr val="94DDDE"/>
+                </a:solidFill>
+                <a:latin typeface="Josefin Sans" panose="020B0604020202020204" charset="0"/>
+                <a:ea typeface="Josefin Sans"/>
+                <a:cs typeface="Josefin Sans"/>
+                <a:sym typeface="Josefin Sans"/>
+              </a:endParaRPr>
+            </a:p>
+          </p:txBody>
+        </p:sp>
+      </p:grpSp>
+      <p:pic>
+        <p:nvPicPr>
+          <p:cNvPr id="6" name="Graphic 5" descr="Shopping cart with solid fill">
+            <a:extLst>
+              <a:ext uri="{FF2B5EF4-FFF2-40B4-BE49-F238E27FC236}">
+                <a16:creationId xmlns:a16="http://schemas.microsoft.com/office/drawing/2014/main" id="{FFC7DE48-E26B-40D0-2D77-A60FCA757F3A}"/>
+              </a:ext>
+            </a:extLst>
+          </p:cNvPr>
+          <p:cNvPicPr>
+            <a:picLocks noChangeAspect="1"/>
+          </p:cNvPicPr>
+          <p:nvPr/>
+        </p:nvPicPr>
+        <p:blipFill>
+          <a:blip r:embed="rId2">
+            <a:extLst>
+              <a:ext uri="{96DAC541-7B7A-43D3-8B79-37D633B846F1}">
+                <asvg:svgBlip xmlns:asvg="http://schemas.microsoft.com/office/drawing/2016/SVG/main" r:embed="rId3"/>
+              </a:ext>
+            </a:extLst>
+          </a:blip>
+          <a:stretch>
+            <a:fillRect/>
+          </a:stretch>
+        </p:blipFill>
+        <p:spPr>
+          <a:xfrm>
+            <a:off x="11125200" y="2588108"/>
+            <a:ext cx="5110784" cy="5110784"/>
+          </a:xfrm>
+          <a:prstGeom prst="rect">
+            <a:avLst/>
+          </a:prstGeom>
+        </p:spPr>
+      </p:pic>
+    </p:spTree>
+    <p:extLst>
+      <p:ext uri="{BB962C8B-B14F-4D97-AF65-F5344CB8AC3E}">
+        <p14:creationId xmlns:p14="http://schemas.microsoft.com/office/powerpoint/2010/main" val="293611491"/>
+      </p:ext>
+    </p:extLst>
+  </p:cSld>
+  <p:clrMapOvr>
+    <a:masterClrMapping/>
+  </p:clrMapOvr>
+  <mc:AlternateContent xmlns:mc="http://schemas.openxmlformats.org/markup-compatibility/2006" xmlns:p159="http://schemas.microsoft.com/office/powerpoint/2015/09/main">
+    <mc:Choice Requires="p159">
+      <p:transition xmlns:p14="http://schemas.microsoft.com/office/powerpoint/2010/main" spd="slow" p14:dur="2000">
+        <p159:morph option="byObject"/>
+      </p:transition>
+    </mc:Choice>
+    <mc:Fallback xmlns="">
+      <p:transition spd="slow">
+        <p:fade/>
+      </p:transition>
+    </mc:Fallback>
+  </mc:AlternateContent>
+</p:sld>
+</file>
+
+<file path=ppt/slides/slide11.xml><?xml version="1.0" encoding="utf-8"?>
+<p:sld xmlns:a="http://schemas.openxmlformats.org/drawingml/2006/main" xmlns:r="http://schemas.openxmlformats.org/officeDocument/2006/relationships" xmlns:p="http://schemas.openxmlformats.org/presentationml/2006/main">
+  <p:cSld>
+    <p:bg>
+      <p:bgPr>
+        <a:solidFill>
+          <a:srgbClr val="2B4B82"/>
+        </a:solidFill>
+        <a:effectLst/>
+      </p:bgPr>
+    </p:bg>
+    <p:spTree>
+      <p:nvGrpSpPr>
+        <p:cNvPr id="1" name="">
+          <a:extLst>
+            <a:ext uri="{FF2B5EF4-FFF2-40B4-BE49-F238E27FC236}">
               <a16:creationId xmlns:a16="http://schemas.microsoft.com/office/drawing/2014/main" id="{91F636DF-0C39-30DF-3376-20F57235D6F1}"/>
             </a:ext>
           </a:extLst>
@@ -4393,7 +4769,7 @@
 </p:sld>
 </file>
 
-<file path=ppt/slides/slide11.xml><?xml version="1.0" encoding="utf-8"?>
+<file path=ppt/slides/slide12.xml><?xml version="1.0" encoding="utf-8"?>
 <p:sld xmlns:a="http://schemas.openxmlformats.org/drawingml/2006/main" xmlns:r="http://schemas.openxmlformats.org/officeDocument/2006/relationships" xmlns:p="http://schemas.openxmlformats.org/presentationml/2006/main">
   <p:cSld>
     <p:bg>
@@ -5562,7 +5938,7 @@
 </p:sld>
 </file>
 
-<file path=ppt/slides/slide12.xml><?xml version="1.0" encoding="utf-8"?>
+<file path=ppt/slides/slide13.xml><?xml version="1.0" encoding="utf-8"?>
 <p:sld xmlns:a="http://schemas.openxmlformats.org/drawingml/2006/main" xmlns:r="http://schemas.openxmlformats.org/officeDocument/2006/relationships" xmlns:p="http://schemas.openxmlformats.org/presentationml/2006/main">
   <p:cSld>
     <p:bg>
@@ -6500,7 +6876,7 @@
 </p:sld>
 </file>
 
-<file path=ppt/slides/slide13.xml><?xml version="1.0" encoding="utf-8"?>
+<file path=ppt/slides/slide14.xml><?xml version="1.0" encoding="utf-8"?>
 <p:sld xmlns:a="http://schemas.openxmlformats.org/drawingml/2006/main" xmlns:r="http://schemas.openxmlformats.org/officeDocument/2006/relationships" xmlns:p="http://schemas.openxmlformats.org/presentationml/2006/main">
   <p:cSld>
     <p:bg>
@@ -7372,7 +7748,7 @@
 </p:sld>
 </file>
 
-<file path=ppt/slides/slide14.xml><?xml version="1.0" encoding="utf-8"?>
+<file path=ppt/slides/slide15.xml><?xml version="1.0" encoding="utf-8"?>
 <p:sld xmlns:a="http://schemas.openxmlformats.org/drawingml/2006/main" xmlns:r="http://schemas.openxmlformats.org/officeDocument/2006/relationships" xmlns:p="http://schemas.openxmlformats.org/presentationml/2006/main">
   <p:cSld>
     <p:bg>
@@ -8007,7 +8383,7 @@
 </p:sld>
 </file>
 
-<file path=ppt/slides/slide15.xml><?xml version="1.0" encoding="utf-8"?>
+<file path=ppt/slides/slide16.xml><?xml version="1.0" encoding="utf-8"?>
 <p:sld xmlns:a="http://schemas.openxmlformats.org/drawingml/2006/main" xmlns:r="http://schemas.openxmlformats.org/officeDocument/2006/relationships" xmlns:p="http://schemas.openxmlformats.org/presentationml/2006/main">
   <p:cSld>
     <p:bg>
@@ -8814,7 +9190,7 @@
 </p:sld>
 </file>
 
-<file path=ppt/slides/slide16.xml><?xml version="1.0" encoding="utf-8"?>
+<file path=ppt/slides/slide17.xml><?xml version="1.0" encoding="utf-8"?>
 <p:sld xmlns:a="http://schemas.openxmlformats.org/drawingml/2006/main" xmlns:r="http://schemas.openxmlformats.org/officeDocument/2006/relationships" xmlns:p="http://schemas.openxmlformats.org/presentationml/2006/main">
   <p:cSld>
     <p:bg>
@@ -9394,7 +9770,7 @@
 </p:sld>
 </file>
 
-<file path=ppt/slides/slide17.xml><?xml version="1.0" encoding="utf-8"?>
+<file path=ppt/slides/slide18.xml><?xml version="1.0" encoding="utf-8"?>
 <p:sld xmlns:a="http://schemas.openxmlformats.org/drawingml/2006/main" xmlns:r="http://schemas.openxmlformats.org/officeDocument/2006/relationships" xmlns:p="http://schemas.openxmlformats.org/presentationml/2006/main">
   <p:cSld>
     <p:bg>
@@ -9508,7 +9884,7 @@
         <p:spPr>
           <a:xfrm>
             <a:off x="914400" y="4000500"/>
-            <a:ext cx="7239000" cy="1969770"/>
+            <a:ext cx="7239000" cy="2954655"/>
           </a:xfrm>
           <a:prstGeom prst="rect">
             <a:avLst/>
@@ -9695,6 +10071,93 @@
               </a:rPr>
               <a:t>time</a:t>
             </a:r>
+            <a:endParaRPr lang="id-ID" sz="3200" dirty="0">
+              <a:solidFill>
+                <a:srgbClr val="4EC9B0"/>
+              </a:solidFill>
+              <a:latin typeface="Consolas" panose="020B0609020204030204" pitchFamily="49" charset="0"/>
+            </a:endParaRPr>
+          </a:p>
+          <a:p>
+            <a:r>
+              <a:rPr lang="id-ID" sz="3200" b="0" dirty="0" err="1">
+                <a:solidFill>
+                  <a:srgbClr val="F47067"/>
+                </a:solidFill>
+                <a:effectLst/>
+                <a:latin typeface="Consolas" panose="020B0609020204030204" pitchFamily="49" charset="0"/>
+              </a:rPr>
+              <a:t>import</a:t>
+            </a:r>
+            <a:r>
+              <a:rPr lang="id-ID" sz="3200" b="0" dirty="0">
+                <a:solidFill>
+                  <a:srgbClr val="ADBAC7"/>
+                </a:solidFill>
+                <a:effectLst/>
+                <a:latin typeface="Consolas" panose="020B0609020204030204" pitchFamily="49" charset="0"/>
+              </a:rPr>
+              <a:t> </a:t>
+            </a:r>
+            <a:r>
+              <a:rPr lang="id-ID" sz="3200" b="0" dirty="0" err="1">
+                <a:solidFill>
+                  <a:srgbClr val="F69D50"/>
+                </a:solidFill>
+                <a:effectLst/>
+                <a:latin typeface="Consolas" panose="020B0609020204030204" pitchFamily="49" charset="0"/>
+              </a:rPr>
+              <a:t>pandas</a:t>
+            </a:r>
+            <a:r>
+              <a:rPr lang="id-ID" sz="3200" b="0" dirty="0">
+                <a:solidFill>
+                  <a:srgbClr val="ADBAC7"/>
+                </a:solidFill>
+                <a:effectLst/>
+                <a:latin typeface="Consolas" panose="020B0609020204030204" pitchFamily="49" charset="0"/>
+              </a:rPr>
+              <a:t> </a:t>
+            </a:r>
+            <a:r>
+              <a:rPr lang="id-ID" sz="3200" b="0" dirty="0">
+                <a:solidFill>
+                  <a:srgbClr val="F47067"/>
+                </a:solidFill>
+                <a:effectLst/>
+                <a:latin typeface="Consolas" panose="020B0609020204030204" pitchFamily="49" charset="0"/>
+              </a:rPr>
+              <a:t>as</a:t>
+            </a:r>
+            <a:r>
+              <a:rPr lang="id-ID" sz="3200" b="0" dirty="0">
+                <a:solidFill>
+                  <a:srgbClr val="ADBAC7"/>
+                </a:solidFill>
+                <a:effectLst/>
+                <a:latin typeface="Consolas" panose="020B0609020204030204" pitchFamily="49" charset="0"/>
+              </a:rPr>
+              <a:t> </a:t>
+            </a:r>
+            <a:r>
+              <a:rPr lang="id-ID" sz="3200" b="0" dirty="0" err="1">
+                <a:solidFill>
+                  <a:srgbClr val="F69D50"/>
+                </a:solidFill>
+                <a:effectLst/>
+                <a:latin typeface="Consolas" panose="020B0609020204030204" pitchFamily="49" charset="0"/>
+              </a:rPr>
+              <a:t>pd</a:t>
+            </a:r>
+            <a:endParaRPr lang="id-ID" sz="3200" b="0" dirty="0">
+              <a:solidFill>
+                <a:srgbClr val="ADBAC7"/>
+              </a:solidFill>
+              <a:effectLst/>
+              <a:latin typeface="Consolas" panose="020B0609020204030204" pitchFamily="49" charset="0"/>
+            </a:endParaRPr>
+          </a:p>
+          <a:p>
             <a:endParaRPr lang="en-US" sz="3200" b="0" dirty="0">
               <a:solidFill>
                 <a:srgbClr val="CCCCCC"/>
@@ -9810,7 +10273,7 @@
 </p:sld>
 </file>
 
-<file path=ppt/slides/slide18.xml><?xml version="1.0" encoding="utf-8"?>
+<file path=ppt/slides/slide19.xml><?xml version="1.0" encoding="utf-8"?>
 <p:sld xmlns:a="http://schemas.openxmlformats.org/drawingml/2006/main" xmlns:r="http://schemas.openxmlformats.org/officeDocument/2006/relationships" xmlns:p="http://schemas.openxmlformats.org/presentationml/2006/main">
   <p:cSld>
     <p:bg>
@@ -10335,160 +10798,6 @@
   <p:clrMapOvr>
     <a:masterClrMapping/>
   </p:clrMapOvr>
-</p:sld>
-</file>
-
-<file path=ppt/slides/slide19.xml><?xml version="1.0" encoding="utf-8"?>
-<p:sld xmlns:a="http://schemas.openxmlformats.org/drawingml/2006/main" xmlns:r="http://schemas.openxmlformats.org/officeDocument/2006/relationships" xmlns:p="http://schemas.openxmlformats.org/presentationml/2006/main">
-  <p:cSld>
-    <p:bg>
-      <p:bgPr>
-        <a:solidFill>
-          <a:srgbClr val="2B4B82"/>
-        </a:solidFill>
-        <a:effectLst/>
-      </p:bgPr>
-    </p:bg>
-    <p:spTree>
-      <p:nvGrpSpPr>
-        <p:cNvPr id="1" name="">
-          <a:extLst>
-            <a:ext uri="{FF2B5EF4-FFF2-40B4-BE49-F238E27FC236}">
-              <a16:creationId xmlns:a16="http://schemas.microsoft.com/office/drawing/2014/main" id="{AAD445E3-1CB8-7539-ACD6-FBF7662A0D0D}"/>
-            </a:ext>
-          </a:extLst>
-        </p:cNvPr>
-        <p:cNvGrpSpPr/>
-        <p:nvPr/>
-      </p:nvGrpSpPr>
-      <p:grpSpPr>
-        <a:xfrm>
-          <a:off x="0" y="0"/>
-          <a:ext cx="0" cy="0"/>
-          <a:chOff x="0" y="0"/>
-          <a:chExt cx="0" cy="0"/>
-        </a:xfrm>
-      </p:grpSpPr>
-      <p:sp>
-        <p:nvSpPr>
-          <p:cNvPr id="3" name="TextBox 3">
-            <a:extLst>
-              <a:ext uri="{FF2B5EF4-FFF2-40B4-BE49-F238E27FC236}">
-                <a16:creationId xmlns:a16="http://schemas.microsoft.com/office/drawing/2014/main" id="{1F5A9119-71BD-E564-55C9-C4E4B66A9249}"/>
-              </a:ext>
-            </a:extLst>
-          </p:cNvPr>
-          <p:cNvSpPr txBox="1"/>
-          <p:nvPr/>
-        </p:nvSpPr>
-        <p:spPr>
-          <a:xfrm>
-            <a:off x="2895600" y="4283418"/>
-            <a:ext cx="6019800" cy="1749838"/>
-          </a:xfrm>
-          <a:prstGeom prst="rect">
-            <a:avLst/>
-          </a:prstGeom>
-        </p:spPr>
-        <p:txBody>
-          <a:bodyPr wrap="square" lIns="0" tIns="0" rIns="0" bIns="0" rtlCol="0" anchor="t">
-            <a:spAutoFit/>
-          </a:bodyPr>
-          <a:lstStyle/>
-          <a:p>
-            <a:pPr algn="just">
-              <a:lnSpc>
-                <a:spcPts val="6720"/>
-              </a:lnSpc>
-            </a:pPr>
-            <a:r>
-              <a:rPr lang="id-ID" sz="6400" b="1" dirty="0" err="1">
-                <a:solidFill>
-                  <a:srgbClr val="F7B4A7"/>
-                </a:solidFill>
-                <a:latin typeface="Josefin Sans Bold"/>
-                <a:ea typeface="Josefin Sans Bold"/>
-                <a:cs typeface="Josefin Sans Bold"/>
-                <a:sym typeface="Josefin Sans Bold"/>
-              </a:rPr>
-              <a:t>Flowchart</a:t>
-            </a:r>
-            <a:r>
-              <a:rPr lang="id-ID" sz="6400" b="1" dirty="0">
-                <a:solidFill>
-                  <a:srgbClr val="F7B4A7"/>
-                </a:solidFill>
-                <a:latin typeface="Josefin Sans Bold"/>
-                <a:ea typeface="Josefin Sans Bold"/>
-                <a:cs typeface="Josefin Sans Bold"/>
-                <a:sym typeface="Josefin Sans Bold"/>
-              </a:rPr>
-              <a:t> Program</a:t>
-            </a:r>
-            <a:endParaRPr lang="en-US" sz="6400" b="1" dirty="0">
-              <a:solidFill>
-                <a:srgbClr val="F7B4A7"/>
-              </a:solidFill>
-              <a:latin typeface="Josefin Sans Bold"/>
-              <a:ea typeface="Josefin Sans Bold"/>
-              <a:cs typeface="Josefin Sans Bold"/>
-              <a:sym typeface="Josefin Sans Bold"/>
-            </a:endParaRPr>
-          </a:p>
-        </p:txBody>
-      </p:sp>
-      <p:pic>
-        <p:nvPicPr>
-          <p:cNvPr id="7" name="Picture 6">
-            <a:extLst>
-              <a:ext uri="{FF2B5EF4-FFF2-40B4-BE49-F238E27FC236}">
-                <a16:creationId xmlns:a16="http://schemas.microsoft.com/office/drawing/2014/main" id="{18EB7126-BAE0-7387-8E5A-09922CB1C089}"/>
-              </a:ext>
-            </a:extLst>
-          </p:cNvPr>
-          <p:cNvPicPr>
-            <a:picLocks noChangeAspect="1"/>
-          </p:cNvPicPr>
-          <p:nvPr/>
-        </p:nvPicPr>
-        <p:blipFill>
-          <a:blip r:embed="rId2"/>
-          <a:stretch>
-            <a:fillRect/>
-          </a:stretch>
-        </p:blipFill>
-        <p:spPr>
-          <a:xfrm>
-            <a:off x="10186262" y="23106"/>
-            <a:ext cx="8101738" cy="10270463"/>
-          </a:xfrm>
-          <a:prstGeom prst="rect">
-            <a:avLst/>
-          </a:prstGeom>
-        </p:spPr>
-      </p:pic>
-    </p:spTree>
-    <p:extLst>
-      <p:ext uri="{BB962C8B-B14F-4D97-AF65-F5344CB8AC3E}">
-        <p14:creationId xmlns:p14="http://schemas.microsoft.com/office/powerpoint/2010/main" val="2106635077"/>
-      </p:ext>
-    </p:extLst>
-  </p:cSld>
-  <p:clrMapOvr>
-    <a:masterClrMapping/>
-  </p:clrMapOvr>
-  <mc:AlternateContent xmlns:mc="http://schemas.openxmlformats.org/markup-compatibility/2006">
-    <mc:Choice xmlns:p159="http://schemas.microsoft.com/office/powerpoint/2015/09/main" Requires="p159">
-      <p:transition xmlns:p14="http://schemas.microsoft.com/office/powerpoint/2010/main" spd="slow" p14:dur="2000">
-        <p159:morph option="byObject"/>
-      </p:transition>
-    </mc:Choice>
-    <mc:Fallback>
-      <p:transition spd="slow">
-        <p:fade/>
-      </p:transition>
-    </mc:Fallback>
-  </mc:AlternateContent>
 </p:sld>
 </file>
 
@@ -10979,6 +11288,160 @@
     </p:bg>
     <p:spTree>
       <p:nvGrpSpPr>
+        <p:cNvPr id="1" name="">
+          <a:extLst>
+            <a:ext uri="{FF2B5EF4-FFF2-40B4-BE49-F238E27FC236}">
+              <a16:creationId xmlns:a16="http://schemas.microsoft.com/office/drawing/2014/main" id="{AAD445E3-1CB8-7539-ACD6-FBF7662A0D0D}"/>
+            </a:ext>
+          </a:extLst>
+        </p:cNvPr>
+        <p:cNvGrpSpPr/>
+        <p:nvPr/>
+      </p:nvGrpSpPr>
+      <p:grpSpPr>
+        <a:xfrm>
+          <a:off x="0" y="0"/>
+          <a:ext cx="0" cy="0"/>
+          <a:chOff x="0" y="0"/>
+          <a:chExt cx="0" cy="0"/>
+        </a:xfrm>
+      </p:grpSpPr>
+      <p:sp>
+        <p:nvSpPr>
+          <p:cNvPr id="3" name="TextBox 3">
+            <a:extLst>
+              <a:ext uri="{FF2B5EF4-FFF2-40B4-BE49-F238E27FC236}">
+                <a16:creationId xmlns:a16="http://schemas.microsoft.com/office/drawing/2014/main" id="{1F5A9119-71BD-E564-55C9-C4E4B66A9249}"/>
+              </a:ext>
+            </a:extLst>
+          </p:cNvPr>
+          <p:cNvSpPr txBox="1"/>
+          <p:nvPr/>
+        </p:nvSpPr>
+        <p:spPr>
+          <a:xfrm>
+            <a:off x="2895600" y="4283418"/>
+            <a:ext cx="6019800" cy="1749838"/>
+          </a:xfrm>
+          <a:prstGeom prst="rect">
+            <a:avLst/>
+          </a:prstGeom>
+        </p:spPr>
+        <p:txBody>
+          <a:bodyPr wrap="square" lIns="0" tIns="0" rIns="0" bIns="0" rtlCol="0" anchor="t">
+            <a:spAutoFit/>
+          </a:bodyPr>
+          <a:lstStyle/>
+          <a:p>
+            <a:pPr algn="just">
+              <a:lnSpc>
+                <a:spcPts val="6720"/>
+              </a:lnSpc>
+            </a:pPr>
+            <a:r>
+              <a:rPr lang="id-ID" sz="6400" b="1" dirty="0" err="1">
+                <a:solidFill>
+                  <a:srgbClr val="F7B4A7"/>
+                </a:solidFill>
+                <a:latin typeface="Josefin Sans Bold"/>
+                <a:ea typeface="Josefin Sans Bold"/>
+                <a:cs typeface="Josefin Sans Bold"/>
+                <a:sym typeface="Josefin Sans Bold"/>
+              </a:rPr>
+              <a:t>Flowchart</a:t>
+            </a:r>
+            <a:r>
+              <a:rPr lang="id-ID" sz="6400" b="1" dirty="0">
+                <a:solidFill>
+                  <a:srgbClr val="F7B4A7"/>
+                </a:solidFill>
+                <a:latin typeface="Josefin Sans Bold"/>
+                <a:ea typeface="Josefin Sans Bold"/>
+                <a:cs typeface="Josefin Sans Bold"/>
+                <a:sym typeface="Josefin Sans Bold"/>
+              </a:rPr>
+              <a:t> Program</a:t>
+            </a:r>
+            <a:endParaRPr lang="en-US" sz="6400" b="1" dirty="0">
+              <a:solidFill>
+                <a:srgbClr val="F7B4A7"/>
+              </a:solidFill>
+              <a:latin typeface="Josefin Sans Bold"/>
+              <a:ea typeface="Josefin Sans Bold"/>
+              <a:cs typeface="Josefin Sans Bold"/>
+              <a:sym typeface="Josefin Sans Bold"/>
+            </a:endParaRPr>
+          </a:p>
+        </p:txBody>
+      </p:sp>
+      <p:pic>
+        <p:nvPicPr>
+          <p:cNvPr id="7" name="Picture 6">
+            <a:extLst>
+              <a:ext uri="{FF2B5EF4-FFF2-40B4-BE49-F238E27FC236}">
+                <a16:creationId xmlns:a16="http://schemas.microsoft.com/office/drawing/2014/main" id="{18EB7126-BAE0-7387-8E5A-09922CB1C089}"/>
+              </a:ext>
+            </a:extLst>
+          </p:cNvPr>
+          <p:cNvPicPr>
+            <a:picLocks noChangeAspect="1"/>
+          </p:cNvPicPr>
+          <p:nvPr/>
+        </p:nvPicPr>
+        <p:blipFill>
+          <a:blip r:embed="rId2"/>
+          <a:stretch>
+            <a:fillRect/>
+          </a:stretch>
+        </p:blipFill>
+        <p:spPr>
+          <a:xfrm>
+            <a:off x="10186262" y="23106"/>
+            <a:ext cx="8101738" cy="10270463"/>
+          </a:xfrm>
+          <a:prstGeom prst="rect">
+            <a:avLst/>
+          </a:prstGeom>
+        </p:spPr>
+      </p:pic>
+    </p:spTree>
+    <p:extLst>
+      <p:ext uri="{BB962C8B-B14F-4D97-AF65-F5344CB8AC3E}">
+        <p14:creationId xmlns:p14="http://schemas.microsoft.com/office/powerpoint/2010/main" val="2106635077"/>
+      </p:ext>
+    </p:extLst>
+  </p:cSld>
+  <p:clrMapOvr>
+    <a:masterClrMapping/>
+  </p:clrMapOvr>
+  <mc:AlternateContent xmlns:mc="http://schemas.openxmlformats.org/markup-compatibility/2006" xmlns:p159="http://schemas.microsoft.com/office/powerpoint/2015/09/main">
+    <mc:Choice Requires="p159">
+      <p:transition xmlns:p14="http://schemas.microsoft.com/office/powerpoint/2010/main" spd="slow" p14:dur="2000">
+        <p159:morph option="byObject"/>
+      </p:transition>
+    </mc:Choice>
+    <mc:Fallback xmlns="">
+      <p:transition spd="slow">
+        <p:fade/>
+      </p:transition>
+    </mc:Fallback>
+  </mc:AlternateContent>
+</p:sld>
+</file>
+
+<file path=ppt/slides/slide21.xml><?xml version="1.0" encoding="utf-8"?>
+<p:sld xmlns:a="http://schemas.openxmlformats.org/drawingml/2006/main" xmlns:r="http://schemas.openxmlformats.org/officeDocument/2006/relationships" xmlns:p="http://schemas.openxmlformats.org/presentationml/2006/main">
+  <p:cSld>
+    <p:bg>
+      <p:bgPr>
+        <a:solidFill>
+          <a:srgbClr val="2B4B82"/>
+        </a:solidFill>
+        <a:effectLst/>
+      </p:bgPr>
+    </p:bg>
+    <p:spTree>
+      <p:nvGrpSpPr>
         <p:cNvPr id="1" name=""/>
         <p:cNvGrpSpPr/>
         <p:nvPr/>
@@ -11633,9 +12096,9 @@
         <p:grpSpPr>
           <a:xfrm>
             <a:off x="1370694" y="5219700"/>
-            <a:ext cx="7544706" cy="5001273"/>
+            <a:ext cx="7544706" cy="4801279"/>
             <a:chOff x="0" y="-19051"/>
-            <a:chExt cx="8369239" cy="6325821"/>
+            <a:chExt cx="8369239" cy="6072861"/>
           </a:xfrm>
         </p:grpSpPr>
         <p:sp>
@@ -11697,7 +12160,7 @@
           <p:spPr>
             <a:xfrm>
               <a:off x="0" y="1382344"/>
-              <a:ext cx="8369239" cy="4924426"/>
+              <a:ext cx="8369239" cy="4671466"/>
             </a:xfrm>
             <a:prstGeom prst="rect">
               <a:avLst/>
@@ -11762,7 +12225,25 @@
                   </a:solidFill>
                   <a:latin typeface="Josefin Sans" panose="020B0604020202020204" charset="0"/>
                 </a:rPr>
-                <a:t>Bagaimana sistem dapat membantu pengguna memantau stok barang dan menghasilkan laporan pengadaan secara otomatis?</a:t>
+                <a:t>Bagaimana sistem dapat membantu pengguna memantau stok barang secara otomatis dan </a:t>
+              </a:r>
+              <a:r>
+                <a:rPr lang="id-ID" sz="2400" dirty="0" err="1">
+                  <a:solidFill>
+                    <a:srgbClr val="2B4B82"/>
+                  </a:solidFill>
+                  <a:latin typeface="Josefin Sans" panose="020B0604020202020204" charset="0"/>
+                </a:rPr>
+                <a:t>realtime</a:t>
+              </a:r>
+              <a:r>
+                <a:rPr lang="id-ID" sz="2400" dirty="0">
+                  <a:solidFill>
+                    <a:srgbClr val="2B4B82"/>
+                  </a:solidFill>
+                  <a:latin typeface="Josefin Sans" panose="020B0604020202020204" charset="0"/>
+                </a:rPr>
+                <a:t>?</a:t>
               </a:r>
               <a:endParaRPr lang="en-US" sz="2400" b="1" dirty="0">
                 <a:solidFill>
@@ -11783,9 +12264,9 @@
         <p:grpSpPr>
           <a:xfrm>
             <a:off x="10893831" y="5219700"/>
-            <a:ext cx="6082836" cy="3021688"/>
+            <a:ext cx="6082836" cy="3391020"/>
             <a:chOff x="0" y="-19051"/>
-            <a:chExt cx="8031299" cy="3764019"/>
+            <a:chExt cx="8031299" cy="4224084"/>
           </a:xfrm>
         </p:grpSpPr>
         <p:sp>
@@ -11847,7 +12328,7 @@
           <p:spPr>
             <a:xfrm>
               <a:off x="0" y="1382344"/>
-              <a:ext cx="8031299" cy="2362624"/>
+              <a:ext cx="8031299" cy="2822689"/>
             </a:xfrm>
             <a:prstGeom prst="rect">
               <a:avLst/>
@@ -11912,7 +12393,25 @@
                   </a:solidFill>
                   <a:latin typeface="Josefin Sans" panose="020B0604020202020204" charset="0"/>
                 </a:rPr>
-                <a:t>Menyediakan laporan pengadaan</a:t>
+                <a:t>Menyediakan </a:t>
+              </a:r>
+              <a:r>
+                <a:rPr lang="id-ID" sz="2400" dirty="0" err="1">
+                  <a:solidFill>
+                    <a:srgbClr val="2B4B82"/>
+                  </a:solidFill>
+                  <a:latin typeface="Josefin Sans" panose="020B0604020202020204" charset="0"/>
+                </a:rPr>
+                <a:t>display</a:t>
+              </a:r>
+              <a:r>
+                <a:rPr lang="id-ID" sz="2400" dirty="0">
+                  <a:solidFill>
+                    <a:srgbClr val="2B4B82"/>
+                  </a:solidFill>
+                  <a:latin typeface="Josefin Sans" panose="020B0604020202020204" charset="0"/>
+                </a:rPr>
+                <a:t> yang membantu melihat stok barang</a:t>
               </a:r>
               <a:endParaRPr lang="en-US" sz="2400" dirty="0">
                 <a:solidFill>
@@ -12774,6 +13273,1024 @@
     </p:bg>
     <p:spTree>
       <p:nvGrpSpPr>
+        <p:cNvPr id="1" name="">
+          <a:extLst>
+            <a:ext uri="{FF2B5EF4-FFF2-40B4-BE49-F238E27FC236}">
+              <a16:creationId xmlns:a16="http://schemas.microsoft.com/office/drawing/2014/main" id="{3B006AEC-0FB1-56A3-2193-5C942C3F6508}"/>
+            </a:ext>
+          </a:extLst>
+        </p:cNvPr>
+        <p:cNvGrpSpPr/>
+        <p:nvPr/>
+      </p:nvGrpSpPr>
+      <p:grpSpPr>
+        <a:xfrm>
+          <a:off x="0" y="0"/>
+          <a:ext cx="0" cy="0"/>
+          <a:chOff x="0" y="0"/>
+          <a:chExt cx="0" cy="0"/>
+        </a:xfrm>
+      </p:grpSpPr>
+      <p:grpSp>
+        <p:nvGrpSpPr>
+          <p:cNvPr id="2" name="Group 2">
+            <a:extLst>
+              <a:ext uri="{FF2B5EF4-FFF2-40B4-BE49-F238E27FC236}">
+                <a16:creationId xmlns:a16="http://schemas.microsoft.com/office/drawing/2014/main" id="{4B210A62-C484-5DA1-659A-B01546EB2BD2}"/>
+              </a:ext>
+            </a:extLst>
+          </p:cNvPr>
+          <p:cNvGrpSpPr/>
+          <p:nvPr/>
+        </p:nvGrpSpPr>
+        <p:grpSpPr>
+          <a:xfrm>
+            <a:off x="609600" y="1731585"/>
+            <a:ext cx="9753599" cy="8079243"/>
+            <a:chOff x="-428976" y="66675"/>
+            <a:chExt cx="9983465" cy="8312547"/>
+          </a:xfrm>
+        </p:grpSpPr>
+        <p:sp>
+          <p:nvSpPr>
+            <p:cNvPr id="3" name="TextBox 3">
+              <a:extLst>
+                <a:ext uri="{FF2B5EF4-FFF2-40B4-BE49-F238E27FC236}">
+                  <a16:creationId xmlns:a16="http://schemas.microsoft.com/office/drawing/2014/main" id="{3FB1CFAB-2F50-5836-9008-D34B31C4BE7F}"/>
+                </a:ext>
+              </a:extLst>
+            </p:cNvPr>
+            <p:cNvSpPr txBox="1"/>
+            <p:nvPr/>
+          </p:nvSpPr>
+          <p:spPr>
+            <a:xfrm>
+              <a:off x="0" y="66675"/>
+              <a:ext cx="9554489" cy="916347"/>
+            </a:xfrm>
+            <a:prstGeom prst="rect">
+              <a:avLst/>
+            </a:prstGeom>
+          </p:spPr>
+          <p:txBody>
+            <a:bodyPr lIns="0" tIns="0" rIns="0" bIns="0" rtlCol="0" anchor="t">
+              <a:spAutoFit/>
+            </a:bodyPr>
+            <a:lstStyle/>
+            <a:p>
+              <a:pPr algn="just">
+                <a:lnSpc>
+                  <a:spcPts val="6720"/>
+                </a:lnSpc>
+              </a:pPr>
+              <a:r>
+                <a:rPr lang="id-ID" sz="6400" b="1" dirty="0">
+                  <a:solidFill>
+                    <a:srgbClr val="F7B4A7"/>
+                  </a:solidFill>
+                  <a:latin typeface="Josefin Sans Bold"/>
+                  <a:ea typeface="Josefin Sans Bold"/>
+                  <a:cs typeface="Josefin Sans Bold"/>
+                  <a:sym typeface="Josefin Sans Bold"/>
+                </a:rPr>
+                <a:t>Pengertian XAMPP</a:t>
+              </a:r>
+              <a:endParaRPr lang="en-US" sz="6400" b="1" dirty="0">
+                <a:solidFill>
+                  <a:srgbClr val="F7B4A7"/>
+                </a:solidFill>
+                <a:latin typeface="Josefin Sans Bold"/>
+                <a:ea typeface="Josefin Sans Bold"/>
+                <a:cs typeface="Josefin Sans Bold"/>
+                <a:sym typeface="Josefin Sans Bold"/>
+              </a:endParaRPr>
+            </a:p>
+          </p:txBody>
+        </p:sp>
+        <p:sp>
+          <p:nvSpPr>
+            <p:cNvPr id="4" name="TextBox 4">
+              <a:extLst>
+                <a:ext uri="{FF2B5EF4-FFF2-40B4-BE49-F238E27FC236}">
+                  <a16:creationId xmlns:a16="http://schemas.microsoft.com/office/drawing/2014/main" id="{C0A9DD5E-D383-0E14-1606-51A567E37EC5}"/>
+                </a:ext>
+              </a:extLst>
+            </p:cNvPr>
+            <p:cNvSpPr txBox="1"/>
+            <p:nvPr/>
+          </p:nvSpPr>
+          <p:spPr>
+            <a:xfrm>
+              <a:off x="0" y="1773905"/>
+              <a:ext cx="9289779" cy="518802"/>
+            </a:xfrm>
+            <a:prstGeom prst="rect">
+              <a:avLst/>
+            </a:prstGeom>
+          </p:spPr>
+          <p:txBody>
+            <a:bodyPr lIns="0" tIns="0" rIns="0" bIns="0" rtlCol="0" anchor="t">
+              <a:spAutoFit/>
+            </a:bodyPr>
+            <a:lstStyle/>
+            <a:p>
+              <a:pPr>
+                <a:lnSpc>
+                  <a:spcPts val="3967"/>
+                </a:lnSpc>
+              </a:pPr>
+              <a:r>
+                <a:rPr lang="id-ID" sz="3200" dirty="0">
+                  <a:solidFill>
+                    <a:srgbClr val="94DDDE"/>
+                  </a:solidFill>
+                  <a:latin typeface="Josefin Sans" panose="020B0604020202020204" charset="0"/>
+                </a:rPr>
+                <a:t>Menurut R. T. </a:t>
+              </a:r>
+              <a:r>
+                <a:rPr lang="id-ID" sz="3200" dirty="0" err="1">
+                  <a:solidFill>
+                    <a:srgbClr val="94DDDE"/>
+                  </a:solidFill>
+                  <a:latin typeface="Josefin Sans" panose="020B0604020202020204" charset="0"/>
+                </a:rPr>
+                <a:t>Gulthom</a:t>
+              </a:r>
+              <a:r>
+                <a:rPr lang="id-ID" sz="3200" dirty="0">
+                  <a:solidFill>
+                    <a:srgbClr val="94DDDE"/>
+                  </a:solidFill>
+                  <a:latin typeface="Josefin Sans" panose="020B0604020202020204" charset="0"/>
+                </a:rPr>
+                <a:t> dan A. R. Siregar (2020)</a:t>
+              </a:r>
+              <a:endParaRPr lang="en-US" sz="3099" spc="471" dirty="0">
+                <a:solidFill>
+                  <a:srgbClr val="94DDDE"/>
+                </a:solidFill>
+                <a:latin typeface="Josefin Sans" panose="020B0604020202020204" charset="0"/>
+                <a:ea typeface="Josefin Sans"/>
+                <a:cs typeface="Josefin Sans"/>
+                <a:sym typeface="Josefin Sans"/>
+              </a:endParaRPr>
+            </a:p>
+          </p:txBody>
+        </p:sp>
+        <p:sp>
+          <p:nvSpPr>
+            <p:cNvPr id="5" name="TextBox 5">
+              <a:extLst>
+                <a:ext uri="{FF2B5EF4-FFF2-40B4-BE49-F238E27FC236}">
+                  <a16:creationId xmlns:a16="http://schemas.microsoft.com/office/drawing/2014/main" id="{6A465585-506B-8186-D038-98376F5255E1}"/>
+                </a:ext>
+              </a:extLst>
+            </p:cNvPr>
+            <p:cNvSpPr txBox="1"/>
+            <p:nvPr/>
+          </p:nvSpPr>
+          <p:spPr>
+            <a:xfrm>
+              <a:off x="-428976" y="3114680"/>
+              <a:ext cx="9289780" cy="5264542"/>
+            </a:xfrm>
+            <a:prstGeom prst="rect">
+              <a:avLst/>
+            </a:prstGeom>
+          </p:spPr>
+          <p:txBody>
+            <a:bodyPr wrap="square" lIns="0" tIns="0" rIns="0" bIns="0" rtlCol="0" anchor="t">
+              <a:spAutoFit/>
+            </a:bodyPr>
+            <a:lstStyle/>
+            <a:p>
+              <a:pPr marL="457200" algn="just">
+                <a:lnSpc>
+                  <a:spcPct val="150000"/>
+                </a:lnSpc>
+                <a:spcAft>
+                  <a:spcPts val="800"/>
+                </a:spcAft>
+              </a:pPr>
+              <a:r>
+                <a:rPr lang="en-ID" sz="2800" kern="100" dirty="0">
+                  <a:solidFill>
+                    <a:srgbClr val="94DDDE"/>
+                  </a:solidFill>
+                  <a:effectLst/>
+                  <a:latin typeface="Josefin Sans" pitchFamily="2" charset="0"/>
+                  <a:ea typeface="Calibri" panose="020F0502020204030204" pitchFamily="34" charset="0"/>
+                  <a:cs typeface="Times New Roman" panose="02020603050405020304" pitchFamily="18" charset="0"/>
+                </a:rPr>
+                <a:t>XAMPP </a:t>
+              </a:r>
+              <a:r>
+                <a:rPr lang="en-ID" sz="2800" kern="100" dirty="0" err="1">
+                  <a:solidFill>
+                    <a:srgbClr val="94DDDE"/>
+                  </a:solidFill>
+                  <a:effectLst/>
+                  <a:latin typeface="Josefin Sans" pitchFamily="2" charset="0"/>
+                  <a:ea typeface="Calibri" panose="020F0502020204030204" pitchFamily="34" charset="0"/>
+                  <a:cs typeface="Times New Roman" panose="02020603050405020304" pitchFamily="18" charset="0"/>
+                </a:rPr>
+                <a:t>adalah</a:t>
+              </a:r>
+              <a:r>
+                <a:rPr lang="en-ID" sz="2800" kern="100" dirty="0">
+                  <a:solidFill>
+                    <a:srgbClr val="94DDDE"/>
+                  </a:solidFill>
+                  <a:effectLst/>
+                  <a:latin typeface="Josefin Sans" pitchFamily="2" charset="0"/>
+                  <a:ea typeface="Calibri" panose="020F0502020204030204" pitchFamily="34" charset="0"/>
+                  <a:cs typeface="Times New Roman" panose="02020603050405020304" pitchFamily="18" charset="0"/>
+                </a:rPr>
+                <a:t> </a:t>
+              </a:r>
+              <a:r>
+                <a:rPr lang="en-ID" sz="2800" kern="100" dirty="0" err="1">
+                  <a:solidFill>
+                    <a:srgbClr val="94DDDE"/>
+                  </a:solidFill>
+                  <a:effectLst/>
+                  <a:latin typeface="Josefin Sans" pitchFamily="2" charset="0"/>
+                  <a:ea typeface="Calibri" panose="020F0502020204030204" pitchFamily="34" charset="0"/>
+                  <a:cs typeface="Times New Roman" panose="02020603050405020304" pitchFamily="18" charset="0"/>
+                </a:rPr>
+                <a:t>alat</a:t>
+              </a:r>
+              <a:r>
+                <a:rPr lang="en-ID" sz="2800" kern="100" dirty="0">
+                  <a:solidFill>
+                    <a:srgbClr val="94DDDE"/>
+                  </a:solidFill>
+                  <a:effectLst/>
+                  <a:latin typeface="Josefin Sans" pitchFamily="2" charset="0"/>
+                  <a:ea typeface="Calibri" panose="020F0502020204030204" pitchFamily="34" charset="0"/>
+                  <a:cs typeface="Times New Roman" panose="02020603050405020304" pitchFamily="18" charset="0"/>
+                </a:rPr>
+                <a:t> yang </a:t>
+              </a:r>
+              <a:r>
+                <a:rPr lang="en-ID" sz="2800" kern="100" dirty="0" err="1">
+                  <a:solidFill>
+                    <a:srgbClr val="94DDDE"/>
+                  </a:solidFill>
+                  <a:effectLst/>
+                  <a:latin typeface="Josefin Sans" pitchFamily="2" charset="0"/>
+                  <a:ea typeface="Calibri" panose="020F0502020204030204" pitchFamily="34" charset="0"/>
+                  <a:cs typeface="Times New Roman" panose="02020603050405020304" pitchFamily="18" charset="0"/>
+                </a:rPr>
+                <a:t>memungkinkan</a:t>
+              </a:r>
+              <a:r>
+                <a:rPr lang="en-ID" sz="2800" kern="100" dirty="0">
+                  <a:solidFill>
+                    <a:srgbClr val="94DDDE"/>
+                  </a:solidFill>
+                  <a:effectLst/>
+                  <a:latin typeface="Josefin Sans" pitchFamily="2" charset="0"/>
+                  <a:ea typeface="Calibri" panose="020F0502020204030204" pitchFamily="34" charset="0"/>
+                  <a:cs typeface="Times New Roman" panose="02020603050405020304" pitchFamily="18" charset="0"/>
+                </a:rPr>
+                <a:t> </a:t>
+              </a:r>
+              <a:r>
+                <a:rPr lang="en-ID" sz="2800" kern="100" dirty="0" err="1">
+                  <a:solidFill>
+                    <a:srgbClr val="94DDDE"/>
+                  </a:solidFill>
+                  <a:effectLst/>
+                  <a:latin typeface="Josefin Sans" pitchFamily="2" charset="0"/>
+                  <a:ea typeface="Calibri" panose="020F0502020204030204" pitchFamily="34" charset="0"/>
+                  <a:cs typeface="Times New Roman" panose="02020603050405020304" pitchFamily="18" charset="0"/>
+                </a:rPr>
+                <a:t>pengembangan</a:t>
+              </a:r>
+              <a:r>
+                <a:rPr lang="en-ID" sz="2800" kern="100" dirty="0">
+                  <a:solidFill>
+                    <a:srgbClr val="94DDDE"/>
+                  </a:solidFill>
+                  <a:effectLst/>
+                  <a:latin typeface="Josefin Sans" pitchFamily="2" charset="0"/>
+                  <a:ea typeface="Calibri" panose="020F0502020204030204" pitchFamily="34" charset="0"/>
+                  <a:cs typeface="Times New Roman" panose="02020603050405020304" pitchFamily="18" charset="0"/>
+                </a:rPr>
+                <a:t> </a:t>
+              </a:r>
+              <a:r>
+                <a:rPr lang="en-ID" sz="2800" kern="100" dirty="0" err="1">
+                  <a:solidFill>
+                    <a:srgbClr val="94DDDE"/>
+                  </a:solidFill>
+                  <a:effectLst/>
+                  <a:latin typeface="Josefin Sans" pitchFamily="2" charset="0"/>
+                  <a:ea typeface="Calibri" panose="020F0502020204030204" pitchFamily="34" charset="0"/>
+                  <a:cs typeface="Times New Roman" panose="02020603050405020304" pitchFamily="18" charset="0"/>
+                </a:rPr>
+                <a:t>aplikasi</a:t>
+              </a:r>
+              <a:r>
+                <a:rPr lang="en-ID" sz="2800" kern="100" dirty="0">
+                  <a:solidFill>
+                    <a:srgbClr val="94DDDE"/>
+                  </a:solidFill>
+                  <a:effectLst/>
+                  <a:latin typeface="Josefin Sans" pitchFamily="2" charset="0"/>
+                  <a:ea typeface="Calibri" panose="020F0502020204030204" pitchFamily="34" charset="0"/>
+                  <a:cs typeface="Times New Roman" panose="02020603050405020304" pitchFamily="18" charset="0"/>
+                </a:rPr>
+                <a:t> web </a:t>
+              </a:r>
+              <a:r>
+                <a:rPr lang="en-ID" sz="2800" kern="100" dirty="0" err="1">
+                  <a:solidFill>
+                    <a:srgbClr val="94DDDE"/>
+                  </a:solidFill>
+                  <a:effectLst/>
+                  <a:latin typeface="Josefin Sans" pitchFamily="2" charset="0"/>
+                  <a:ea typeface="Calibri" panose="020F0502020204030204" pitchFamily="34" charset="0"/>
+                  <a:cs typeface="Times New Roman" panose="02020603050405020304" pitchFamily="18" charset="0"/>
+                </a:rPr>
+                <a:t>dengan</a:t>
+              </a:r>
+              <a:r>
+                <a:rPr lang="en-ID" sz="2800" kern="100" dirty="0">
+                  <a:solidFill>
+                    <a:srgbClr val="94DDDE"/>
+                  </a:solidFill>
+                  <a:effectLst/>
+                  <a:latin typeface="Josefin Sans" pitchFamily="2" charset="0"/>
+                  <a:ea typeface="Calibri" panose="020F0502020204030204" pitchFamily="34" charset="0"/>
+                  <a:cs typeface="Times New Roman" panose="02020603050405020304" pitchFamily="18" charset="0"/>
+                </a:rPr>
+                <a:t> </a:t>
+              </a:r>
+              <a:r>
+                <a:rPr lang="en-ID" sz="2800" kern="100" dirty="0" err="1">
+                  <a:solidFill>
+                    <a:srgbClr val="94DDDE"/>
+                  </a:solidFill>
+                  <a:effectLst/>
+                  <a:latin typeface="Josefin Sans" pitchFamily="2" charset="0"/>
+                  <a:ea typeface="Calibri" panose="020F0502020204030204" pitchFamily="34" charset="0"/>
+                  <a:cs typeface="Times New Roman" panose="02020603050405020304" pitchFamily="18" charset="0"/>
+                </a:rPr>
+                <a:t>menggunakan</a:t>
+              </a:r>
+              <a:r>
+                <a:rPr lang="en-ID" sz="2800" kern="100" dirty="0">
+                  <a:solidFill>
+                    <a:srgbClr val="94DDDE"/>
+                  </a:solidFill>
+                  <a:effectLst/>
+                  <a:latin typeface="Josefin Sans" pitchFamily="2" charset="0"/>
+                  <a:ea typeface="Calibri" panose="020F0502020204030204" pitchFamily="34" charset="0"/>
+                  <a:cs typeface="Times New Roman" panose="02020603050405020304" pitchFamily="18" charset="0"/>
+                </a:rPr>
+                <a:t> </a:t>
+              </a:r>
+              <a:r>
+                <a:rPr lang="en-ID" sz="2800" kern="100" dirty="0" err="1">
+                  <a:solidFill>
+                    <a:srgbClr val="94DDDE"/>
+                  </a:solidFill>
+                  <a:effectLst/>
+                  <a:latin typeface="Josefin Sans" pitchFamily="2" charset="0"/>
+                  <a:ea typeface="Calibri" panose="020F0502020204030204" pitchFamily="34" charset="0"/>
+                  <a:cs typeface="Times New Roman" panose="02020603050405020304" pitchFamily="18" charset="0"/>
+                </a:rPr>
+                <a:t>teknologi</a:t>
+              </a:r>
+              <a:r>
+                <a:rPr lang="en-ID" sz="2800" kern="100" dirty="0">
+                  <a:solidFill>
+                    <a:srgbClr val="94DDDE"/>
+                  </a:solidFill>
+                  <a:effectLst/>
+                  <a:latin typeface="Josefin Sans" pitchFamily="2" charset="0"/>
+                  <a:ea typeface="Calibri" panose="020F0502020204030204" pitchFamily="34" charset="0"/>
+                  <a:cs typeface="Times New Roman" panose="02020603050405020304" pitchFamily="18" charset="0"/>
+                </a:rPr>
+                <a:t> </a:t>
+              </a:r>
+              <a:r>
+                <a:rPr lang="en-ID" sz="2800" b="1" kern="100" dirty="0">
+                  <a:solidFill>
+                    <a:srgbClr val="94DDDE"/>
+                  </a:solidFill>
+                  <a:effectLst/>
+                  <a:latin typeface="Josefin Sans" pitchFamily="2" charset="0"/>
+                  <a:ea typeface="Calibri" panose="020F0502020204030204" pitchFamily="34" charset="0"/>
+                  <a:cs typeface="Times New Roman" panose="02020603050405020304" pitchFamily="18" charset="0"/>
+                </a:rPr>
+                <a:t>PHP</a:t>
+              </a:r>
+              <a:r>
+                <a:rPr lang="en-ID" sz="2800" kern="100" dirty="0">
+                  <a:solidFill>
+                    <a:srgbClr val="94DDDE"/>
+                  </a:solidFill>
+                  <a:effectLst/>
+                  <a:latin typeface="Josefin Sans" pitchFamily="2" charset="0"/>
+                  <a:ea typeface="Calibri" panose="020F0502020204030204" pitchFamily="34" charset="0"/>
+                  <a:cs typeface="Times New Roman" panose="02020603050405020304" pitchFamily="18" charset="0"/>
+                </a:rPr>
+                <a:t> dan </a:t>
+              </a:r>
+              <a:r>
+                <a:rPr lang="en-ID" sz="2800" b="1" kern="100" dirty="0">
+                  <a:solidFill>
+                    <a:srgbClr val="94DDDE"/>
+                  </a:solidFill>
+                  <a:effectLst/>
+                  <a:latin typeface="Josefin Sans" pitchFamily="2" charset="0"/>
+                  <a:ea typeface="Calibri" panose="020F0502020204030204" pitchFamily="34" charset="0"/>
+                  <a:cs typeface="Times New Roman" panose="02020603050405020304" pitchFamily="18" charset="0"/>
+                </a:rPr>
+                <a:t>MySQL</a:t>
+              </a:r>
+              <a:r>
+                <a:rPr lang="en-ID" sz="2800" kern="100" dirty="0">
+                  <a:solidFill>
+                    <a:srgbClr val="94DDDE"/>
+                  </a:solidFill>
+                  <a:effectLst/>
+                  <a:latin typeface="Josefin Sans" pitchFamily="2" charset="0"/>
+                  <a:ea typeface="Calibri" panose="020F0502020204030204" pitchFamily="34" charset="0"/>
+                  <a:cs typeface="Times New Roman" panose="02020603050405020304" pitchFamily="18" charset="0"/>
+                </a:rPr>
+                <a:t> di server </a:t>
+              </a:r>
+              <a:r>
+                <a:rPr lang="en-ID" sz="2800" kern="100" dirty="0" err="1">
+                  <a:solidFill>
+                    <a:srgbClr val="94DDDE"/>
+                  </a:solidFill>
+                  <a:effectLst/>
+                  <a:latin typeface="Josefin Sans" pitchFamily="2" charset="0"/>
+                  <a:ea typeface="Calibri" panose="020F0502020204030204" pitchFamily="34" charset="0"/>
+                  <a:cs typeface="Times New Roman" panose="02020603050405020304" pitchFamily="18" charset="0"/>
+                </a:rPr>
+                <a:t>lokal</a:t>
+              </a:r>
+              <a:r>
+                <a:rPr lang="en-ID" sz="2800" kern="100" dirty="0">
+                  <a:solidFill>
+                    <a:srgbClr val="94DDDE"/>
+                  </a:solidFill>
+                  <a:effectLst/>
+                  <a:latin typeface="Josefin Sans" pitchFamily="2" charset="0"/>
+                  <a:ea typeface="Calibri" panose="020F0502020204030204" pitchFamily="34" charset="0"/>
+                  <a:cs typeface="Times New Roman" panose="02020603050405020304" pitchFamily="18" charset="0"/>
+                </a:rPr>
+                <a:t>. Software </a:t>
+              </a:r>
+              <a:r>
+                <a:rPr lang="en-ID" sz="2800" kern="100" dirty="0" err="1">
+                  <a:solidFill>
+                    <a:srgbClr val="94DDDE"/>
+                  </a:solidFill>
+                  <a:effectLst/>
+                  <a:latin typeface="Josefin Sans" pitchFamily="2" charset="0"/>
+                  <a:ea typeface="Calibri" panose="020F0502020204030204" pitchFamily="34" charset="0"/>
+                  <a:cs typeface="Times New Roman" panose="02020603050405020304" pitchFamily="18" charset="0"/>
+                </a:rPr>
+                <a:t>ini</a:t>
+              </a:r>
+              <a:r>
+                <a:rPr lang="en-ID" sz="2800" kern="100" dirty="0">
+                  <a:solidFill>
+                    <a:srgbClr val="94DDDE"/>
+                  </a:solidFill>
+                  <a:effectLst/>
+                  <a:latin typeface="Josefin Sans" pitchFamily="2" charset="0"/>
+                  <a:ea typeface="Calibri" panose="020F0502020204030204" pitchFamily="34" charset="0"/>
+                  <a:cs typeface="Times New Roman" panose="02020603050405020304" pitchFamily="18" charset="0"/>
+                </a:rPr>
+                <a:t> sangat </a:t>
+              </a:r>
+              <a:r>
+                <a:rPr lang="en-ID" sz="2800" kern="100" dirty="0" err="1">
+                  <a:solidFill>
+                    <a:srgbClr val="94DDDE"/>
+                  </a:solidFill>
+                  <a:effectLst/>
+                  <a:latin typeface="Josefin Sans" pitchFamily="2" charset="0"/>
+                  <a:ea typeface="Calibri" panose="020F0502020204030204" pitchFamily="34" charset="0"/>
+                  <a:cs typeface="Times New Roman" panose="02020603050405020304" pitchFamily="18" charset="0"/>
+                </a:rPr>
+                <a:t>berguna</a:t>
+              </a:r>
+              <a:r>
+                <a:rPr lang="en-ID" sz="2800" kern="100" dirty="0">
+                  <a:solidFill>
+                    <a:srgbClr val="94DDDE"/>
+                  </a:solidFill>
+                  <a:effectLst/>
+                  <a:latin typeface="Josefin Sans" pitchFamily="2" charset="0"/>
+                  <a:ea typeface="Calibri" panose="020F0502020204030204" pitchFamily="34" charset="0"/>
+                  <a:cs typeface="Times New Roman" panose="02020603050405020304" pitchFamily="18" charset="0"/>
+                </a:rPr>
+                <a:t> </a:t>
+              </a:r>
+              <a:r>
+                <a:rPr lang="en-ID" sz="2800" kern="100" dirty="0" err="1">
+                  <a:solidFill>
+                    <a:srgbClr val="94DDDE"/>
+                  </a:solidFill>
+                  <a:effectLst/>
+                  <a:latin typeface="Josefin Sans" pitchFamily="2" charset="0"/>
+                  <a:ea typeface="Calibri" panose="020F0502020204030204" pitchFamily="34" charset="0"/>
+                  <a:cs typeface="Times New Roman" panose="02020603050405020304" pitchFamily="18" charset="0"/>
+                </a:rPr>
+                <a:t>untuk</a:t>
+              </a:r>
+              <a:r>
+                <a:rPr lang="en-ID" sz="2800" kern="100" dirty="0">
+                  <a:solidFill>
+                    <a:srgbClr val="94DDDE"/>
+                  </a:solidFill>
+                  <a:effectLst/>
+                  <a:latin typeface="Josefin Sans" pitchFamily="2" charset="0"/>
+                  <a:ea typeface="Calibri" panose="020F0502020204030204" pitchFamily="34" charset="0"/>
+                  <a:cs typeface="Times New Roman" panose="02020603050405020304" pitchFamily="18" charset="0"/>
+                </a:rPr>
+                <a:t> </a:t>
+              </a:r>
+              <a:r>
+                <a:rPr lang="en-ID" sz="2800" kern="100" dirty="0" err="1">
+                  <a:solidFill>
+                    <a:srgbClr val="94DDDE"/>
+                  </a:solidFill>
+                  <a:effectLst/>
+                  <a:latin typeface="Josefin Sans" pitchFamily="2" charset="0"/>
+                  <a:ea typeface="Calibri" panose="020F0502020204030204" pitchFamily="34" charset="0"/>
+                  <a:cs typeface="Times New Roman" panose="02020603050405020304" pitchFamily="18" charset="0"/>
+                </a:rPr>
+                <a:t>pengujian</a:t>
+              </a:r>
+              <a:r>
+                <a:rPr lang="en-ID" sz="2800" kern="100" dirty="0">
+                  <a:solidFill>
+                    <a:srgbClr val="94DDDE"/>
+                  </a:solidFill>
+                  <a:effectLst/>
+                  <a:latin typeface="Josefin Sans" pitchFamily="2" charset="0"/>
+                  <a:ea typeface="Calibri" panose="020F0502020204030204" pitchFamily="34" charset="0"/>
+                  <a:cs typeface="Times New Roman" panose="02020603050405020304" pitchFamily="18" charset="0"/>
+                </a:rPr>
+                <a:t> </a:t>
+              </a:r>
+              <a:r>
+                <a:rPr lang="en-ID" sz="2800" kern="100" dirty="0" err="1">
+                  <a:solidFill>
+                    <a:srgbClr val="94DDDE"/>
+                  </a:solidFill>
+                  <a:effectLst/>
+                  <a:latin typeface="Josefin Sans" pitchFamily="2" charset="0"/>
+                  <a:ea typeface="Calibri" panose="020F0502020204030204" pitchFamily="34" charset="0"/>
+                  <a:cs typeface="Times New Roman" panose="02020603050405020304" pitchFamily="18" charset="0"/>
+                </a:rPr>
+                <a:t>aplikasi</a:t>
+              </a:r>
+              <a:r>
+                <a:rPr lang="en-ID" sz="2800" kern="100" dirty="0">
+                  <a:solidFill>
+                    <a:srgbClr val="94DDDE"/>
+                  </a:solidFill>
+                  <a:effectLst/>
+                  <a:latin typeface="Josefin Sans" pitchFamily="2" charset="0"/>
+                  <a:ea typeface="Calibri" panose="020F0502020204030204" pitchFamily="34" charset="0"/>
+                  <a:cs typeface="Times New Roman" panose="02020603050405020304" pitchFamily="18" charset="0"/>
+                </a:rPr>
+                <a:t> web </a:t>
+              </a:r>
+              <a:r>
+                <a:rPr lang="en-ID" sz="2800" kern="100" dirty="0" err="1">
+                  <a:solidFill>
+                    <a:srgbClr val="94DDDE"/>
+                  </a:solidFill>
+                  <a:effectLst/>
+                  <a:latin typeface="Josefin Sans" pitchFamily="2" charset="0"/>
+                  <a:ea typeface="Calibri" panose="020F0502020204030204" pitchFamily="34" charset="0"/>
+                  <a:cs typeface="Times New Roman" panose="02020603050405020304" pitchFamily="18" charset="0"/>
+                </a:rPr>
+                <a:t>tanpa</a:t>
+              </a:r>
+              <a:r>
+                <a:rPr lang="en-ID" sz="2800" kern="100" dirty="0">
+                  <a:solidFill>
+                    <a:srgbClr val="94DDDE"/>
+                  </a:solidFill>
+                  <a:effectLst/>
+                  <a:latin typeface="Josefin Sans" pitchFamily="2" charset="0"/>
+                  <a:ea typeface="Calibri" panose="020F0502020204030204" pitchFamily="34" charset="0"/>
+                  <a:cs typeface="Times New Roman" panose="02020603050405020304" pitchFamily="18" charset="0"/>
+                </a:rPr>
+                <a:t> </a:t>
+              </a:r>
+              <a:r>
+                <a:rPr lang="en-ID" sz="2800" kern="100" dirty="0" err="1">
+                  <a:solidFill>
+                    <a:srgbClr val="94DDDE"/>
+                  </a:solidFill>
+                  <a:effectLst/>
+                  <a:latin typeface="Josefin Sans" pitchFamily="2" charset="0"/>
+                  <a:ea typeface="Calibri" panose="020F0502020204030204" pitchFamily="34" charset="0"/>
+                  <a:cs typeface="Times New Roman" panose="02020603050405020304" pitchFamily="18" charset="0"/>
+                </a:rPr>
+                <a:t>memerlukan</a:t>
+              </a:r>
+              <a:r>
+                <a:rPr lang="en-ID" sz="2800" kern="100" dirty="0">
+                  <a:solidFill>
+                    <a:srgbClr val="94DDDE"/>
+                  </a:solidFill>
+                  <a:effectLst/>
+                  <a:latin typeface="Josefin Sans" pitchFamily="2" charset="0"/>
+                  <a:ea typeface="Calibri" panose="020F0502020204030204" pitchFamily="34" charset="0"/>
+                  <a:cs typeface="Times New Roman" panose="02020603050405020304" pitchFamily="18" charset="0"/>
+                </a:rPr>
+                <a:t> </a:t>
+              </a:r>
+              <a:r>
+                <a:rPr lang="en-ID" sz="2800" kern="100" dirty="0" err="1">
+                  <a:solidFill>
+                    <a:srgbClr val="94DDDE"/>
+                  </a:solidFill>
+                  <a:effectLst/>
+                  <a:latin typeface="Josefin Sans" pitchFamily="2" charset="0"/>
+                  <a:ea typeface="Calibri" panose="020F0502020204030204" pitchFamily="34" charset="0"/>
+                  <a:cs typeface="Times New Roman" panose="02020603050405020304" pitchFamily="18" charset="0"/>
+                </a:rPr>
+                <a:t>koneksi</a:t>
+              </a:r>
+              <a:r>
+                <a:rPr lang="en-ID" sz="2800" kern="100" dirty="0">
+                  <a:solidFill>
+                    <a:srgbClr val="94DDDE"/>
+                  </a:solidFill>
+                  <a:effectLst/>
+                  <a:latin typeface="Josefin Sans" pitchFamily="2" charset="0"/>
+                  <a:ea typeface="Calibri" panose="020F0502020204030204" pitchFamily="34" charset="0"/>
+                  <a:cs typeface="Times New Roman" panose="02020603050405020304" pitchFamily="18" charset="0"/>
+                </a:rPr>
+                <a:t> internet yang </a:t>
+              </a:r>
+              <a:r>
+                <a:rPr lang="en-ID" sz="2800" kern="100" dirty="0" err="1">
+                  <a:solidFill>
+                    <a:srgbClr val="94DDDE"/>
+                  </a:solidFill>
+                  <a:effectLst/>
+                  <a:latin typeface="Josefin Sans" pitchFamily="2" charset="0"/>
+                  <a:ea typeface="Calibri" panose="020F0502020204030204" pitchFamily="34" charset="0"/>
+                  <a:cs typeface="Times New Roman" panose="02020603050405020304" pitchFamily="18" charset="0"/>
+                </a:rPr>
+                <a:t>stabil</a:t>
+              </a:r>
+              <a:r>
+                <a:rPr lang="en-ID" sz="2800" kern="100" dirty="0">
+                  <a:solidFill>
+                    <a:srgbClr val="94DDDE"/>
+                  </a:solidFill>
+                  <a:effectLst/>
+                  <a:latin typeface="Josefin Sans" pitchFamily="2" charset="0"/>
+                  <a:ea typeface="Calibri" panose="020F0502020204030204" pitchFamily="34" charset="0"/>
+                  <a:cs typeface="Times New Roman" panose="02020603050405020304" pitchFamily="18" charset="0"/>
+                </a:rPr>
+                <a:t>. </a:t>
+              </a:r>
+              <a:r>
+                <a:rPr lang="en-ID" sz="2800" kern="100" dirty="0" err="1">
+                  <a:solidFill>
+                    <a:srgbClr val="94DDDE"/>
+                  </a:solidFill>
+                  <a:effectLst/>
+                  <a:latin typeface="Josefin Sans" pitchFamily="2" charset="0"/>
+                  <a:ea typeface="Calibri" panose="020F0502020204030204" pitchFamily="34" charset="0"/>
+                  <a:cs typeface="Times New Roman" panose="02020603050405020304" pitchFamily="18" charset="0"/>
+                </a:rPr>
+                <a:t>Dengan</a:t>
+              </a:r>
+              <a:r>
+                <a:rPr lang="en-ID" sz="2800" kern="100" dirty="0">
+                  <a:solidFill>
+                    <a:srgbClr val="94DDDE"/>
+                  </a:solidFill>
+                  <a:effectLst/>
+                  <a:latin typeface="Josefin Sans" pitchFamily="2" charset="0"/>
+                  <a:ea typeface="Calibri" panose="020F0502020204030204" pitchFamily="34" charset="0"/>
+                  <a:cs typeface="Times New Roman" panose="02020603050405020304" pitchFamily="18" charset="0"/>
+                </a:rPr>
+                <a:t> XAMPP, </a:t>
+              </a:r>
+              <a:r>
+                <a:rPr lang="en-ID" sz="2800" kern="100" dirty="0" err="1">
+                  <a:solidFill>
+                    <a:srgbClr val="94DDDE"/>
+                  </a:solidFill>
+                  <a:effectLst/>
+                  <a:latin typeface="Josefin Sans" pitchFamily="2" charset="0"/>
+                  <a:ea typeface="Calibri" panose="020F0502020204030204" pitchFamily="34" charset="0"/>
+                  <a:cs typeface="Times New Roman" panose="02020603050405020304" pitchFamily="18" charset="0"/>
+                </a:rPr>
+                <a:t>pengembang</a:t>
+              </a:r>
+              <a:r>
+                <a:rPr lang="en-ID" sz="2800" kern="100" dirty="0">
+                  <a:solidFill>
+                    <a:srgbClr val="94DDDE"/>
+                  </a:solidFill>
+                  <a:effectLst/>
+                  <a:latin typeface="Josefin Sans" pitchFamily="2" charset="0"/>
+                  <a:ea typeface="Calibri" panose="020F0502020204030204" pitchFamily="34" charset="0"/>
+                  <a:cs typeface="Times New Roman" panose="02020603050405020304" pitchFamily="18" charset="0"/>
+                </a:rPr>
+                <a:t> </a:t>
+              </a:r>
+              <a:r>
+                <a:rPr lang="en-ID" sz="2800" kern="100" dirty="0" err="1">
+                  <a:solidFill>
+                    <a:srgbClr val="94DDDE"/>
+                  </a:solidFill>
+                  <a:effectLst/>
+                  <a:latin typeface="Josefin Sans" pitchFamily="2" charset="0"/>
+                  <a:ea typeface="Calibri" panose="020F0502020204030204" pitchFamily="34" charset="0"/>
+                  <a:cs typeface="Times New Roman" panose="02020603050405020304" pitchFamily="18" charset="0"/>
+                </a:rPr>
+                <a:t>dapat</a:t>
+              </a:r>
+              <a:r>
+                <a:rPr lang="en-ID" sz="2800" kern="100" dirty="0">
+                  <a:solidFill>
+                    <a:srgbClr val="94DDDE"/>
+                  </a:solidFill>
+                  <a:effectLst/>
+                  <a:latin typeface="Josefin Sans" pitchFamily="2" charset="0"/>
+                  <a:ea typeface="Calibri" panose="020F0502020204030204" pitchFamily="34" charset="0"/>
+                  <a:cs typeface="Times New Roman" panose="02020603050405020304" pitchFamily="18" charset="0"/>
+                </a:rPr>
+                <a:t> </a:t>
+              </a:r>
+              <a:r>
+                <a:rPr lang="en-ID" sz="2800" kern="100" dirty="0" err="1">
+                  <a:solidFill>
+                    <a:srgbClr val="94DDDE"/>
+                  </a:solidFill>
+                  <a:effectLst/>
+                  <a:latin typeface="Josefin Sans" pitchFamily="2" charset="0"/>
+                  <a:ea typeface="Calibri" panose="020F0502020204030204" pitchFamily="34" charset="0"/>
+                  <a:cs typeface="Times New Roman" panose="02020603050405020304" pitchFamily="18" charset="0"/>
+                </a:rPr>
+                <a:t>langsung</a:t>
+              </a:r>
+              <a:r>
+                <a:rPr lang="en-ID" sz="2800" kern="100" dirty="0">
+                  <a:solidFill>
+                    <a:srgbClr val="94DDDE"/>
+                  </a:solidFill>
+                  <a:effectLst/>
+                  <a:latin typeface="Josefin Sans" pitchFamily="2" charset="0"/>
+                  <a:ea typeface="Calibri" panose="020F0502020204030204" pitchFamily="34" charset="0"/>
+                  <a:cs typeface="Times New Roman" panose="02020603050405020304" pitchFamily="18" charset="0"/>
+                </a:rPr>
+                <a:t> </a:t>
+              </a:r>
+              <a:r>
+                <a:rPr lang="en-ID" sz="2800" kern="100" dirty="0" err="1">
+                  <a:solidFill>
+                    <a:srgbClr val="94DDDE"/>
+                  </a:solidFill>
+                  <a:effectLst/>
+                  <a:latin typeface="Josefin Sans" pitchFamily="2" charset="0"/>
+                  <a:ea typeface="Calibri" panose="020F0502020204030204" pitchFamily="34" charset="0"/>
+                  <a:cs typeface="Times New Roman" panose="02020603050405020304" pitchFamily="18" charset="0"/>
+                </a:rPr>
+                <a:t>mengembangkan</a:t>
+              </a:r>
+              <a:r>
+                <a:rPr lang="en-ID" sz="2800" kern="100" dirty="0">
+                  <a:solidFill>
+                    <a:srgbClr val="94DDDE"/>
+                  </a:solidFill>
+                  <a:effectLst/>
+                  <a:latin typeface="Josefin Sans" pitchFamily="2" charset="0"/>
+                  <a:ea typeface="Calibri" panose="020F0502020204030204" pitchFamily="34" charset="0"/>
+                  <a:cs typeface="Times New Roman" panose="02020603050405020304" pitchFamily="18" charset="0"/>
+                </a:rPr>
+                <a:t>, </a:t>
+              </a:r>
+              <a:r>
+                <a:rPr lang="en-ID" sz="2800" kern="100" dirty="0" err="1">
+                  <a:solidFill>
+                    <a:srgbClr val="94DDDE"/>
+                  </a:solidFill>
+                  <a:effectLst/>
+                  <a:latin typeface="Josefin Sans" pitchFamily="2" charset="0"/>
+                  <a:ea typeface="Calibri" panose="020F0502020204030204" pitchFamily="34" charset="0"/>
+                  <a:cs typeface="Times New Roman" panose="02020603050405020304" pitchFamily="18" charset="0"/>
+                </a:rPr>
+                <a:t>menguji</a:t>
+              </a:r>
+              <a:r>
+                <a:rPr lang="en-ID" sz="2800" kern="100" dirty="0">
+                  <a:solidFill>
+                    <a:srgbClr val="94DDDE"/>
+                  </a:solidFill>
+                  <a:effectLst/>
+                  <a:latin typeface="Josefin Sans" pitchFamily="2" charset="0"/>
+                  <a:ea typeface="Calibri" panose="020F0502020204030204" pitchFamily="34" charset="0"/>
+                  <a:cs typeface="Times New Roman" panose="02020603050405020304" pitchFamily="18" charset="0"/>
+                </a:rPr>
+                <a:t>, dan </a:t>
+              </a:r>
+              <a:r>
+                <a:rPr lang="en-ID" sz="2800" kern="100" dirty="0" err="1">
+                  <a:solidFill>
+                    <a:srgbClr val="94DDDE"/>
+                  </a:solidFill>
+                  <a:effectLst/>
+                  <a:latin typeface="Josefin Sans" pitchFamily="2" charset="0"/>
+                  <a:ea typeface="Calibri" panose="020F0502020204030204" pitchFamily="34" charset="0"/>
+                  <a:cs typeface="Times New Roman" panose="02020603050405020304" pitchFamily="18" charset="0"/>
+                </a:rPr>
+                <a:t>memodifikasi</a:t>
+              </a:r>
+              <a:r>
+                <a:rPr lang="en-ID" sz="2800" kern="100" dirty="0">
+                  <a:solidFill>
+                    <a:srgbClr val="94DDDE"/>
+                  </a:solidFill>
+                  <a:effectLst/>
+                  <a:latin typeface="Josefin Sans" pitchFamily="2" charset="0"/>
+                  <a:ea typeface="Calibri" panose="020F0502020204030204" pitchFamily="34" charset="0"/>
+                  <a:cs typeface="Times New Roman" panose="02020603050405020304" pitchFamily="18" charset="0"/>
+                </a:rPr>
+                <a:t> </a:t>
+              </a:r>
+              <a:r>
+                <a:rPr lang="en-ID" sz="2800" kern="100" dirty="0" err="1">
+                  <a:solidFill>
+                    <a:srgbClr val="94DDDE"/>
+                  </a:solidFill>
+                  <a:effectLst/>
+                  <a:latin typeface="Josefin Sans" pitchFamily="2" charset="0"/>
+                  <a:ea typeface="Calibri" panose="020F0502020204030204" pitchFamily="34" charset="0"/>
+                  <a:cs typeface="Times New Roman" panose="02020603050405020304" pitchFamily="18" charset="0"/>
+                </a:rPr>
+                <a:t>aplikasi</a:t>
+              </a:r>
+              <a:r>
+                <a:rPr lang="en-ID" sz="2800" kern="100" dirty="0">
+                  <a:solidFill>
+                    <a:srgbClr val="94DDDE"/>
+                  </a:solidFill>
+                  <a:effectLst/>
+                  <a:latin typeface="Josefin Sans" pitchFamily="2" charset="0"/>
+                  <a:ea typeface="Calibri" panose="020F0502020204030204" pitchFamily="34" charset="0"/>
+                  <a:cs typeface="Times New Roman" panose="02020603050405020304" pitchFamily="18" charset="0"/>
+                </a:rPr>
+                <a:t> web </a:t>
+              </a:r>
+              <a:r>
+                <a:rPr lang="en-ID" sz="2800" kern="100" dirty="0" err="1">
+                  <a:solidFill>
+                    <a:srgbClr val="94DDDE"/>
+                  </a:solidFill>
+                  <a:effectLst/>
+                  <a:latin typeface="Josefin Sans" pitchFamily="2" charset="0"/>
+                  <a:ea typeface="Calibri" panose="020F0502020204030204" pitchFamily="34" charset="0"/>
+                  <a:cs typeface="Times New Roman" panose="02020603050405020304" pitchFamily="18" charset="0"/>
+                </a:rPr>
+                <a:t>secara</a:t>
+              </a:r>
+              <a:r>
+                <a:rPr lang="en-ID" sz="2800" kern="100" dirty="0">
+                  <a:solidFill>
+                    <a:srgbClr val="94DDDE"/>
+                  </a:solidFill>
+                  <a:effectLst/>
+                  <a:latin typeface="Josefin Sans" pitchFamily="2" charset="0"/>
+                  <a:ea typeface="Calibri" panose="020F0502020204030204" pitchFamily="34" charset="0"/>
+                  <a:cs typeface="Times New Roman" panose="02020603050405020304" pitchFamily="18" charset="0"/>
+                </a:rPr>
+                <a:t> </a:t>
+              </a:r>
+              <a:r>
+                <a:rPr lang="en-ID" sz="2800" kern="100" dirty="0" err="1">
+                  <a:solidFill>
+                    <a:srgbClr val="94DDDE"/>
+                  </a:solidFill>
+                  <a:effectLst/>
+                  <a:latin typeface="Josefin Sans" pitchFamily="2" charset="0"/>
+                  <a:ea typeface="Calibri" panose="020F0502020204030204" pitchFamily="34" charset="0"/>
+                  <a:cs typeface="Times New Roman" panose="02020603050405020304" pitchFamily="18" charset="0"/>
+                </a:rPr>
+                <a:t>efisien</a:t>
+              </a:r>
+              <a:r>
+                <a:rPr lang="en-ID" sz="2800" kern="100" dirty="0">
+                  <a:solidFill>
+                    <a:srgbClr val="94DDDE"/>
+                  </a:solidFill>
+                  <a:effectLst/>
+                  <a:latin typeface="Josefin Sans" pitchFamily="2" charset="0"/>
+                  <a:ea typeface="Calibri" panose="020F0502020204030204" pitchFamily="34" charset="0"/>
+                  <a:cs typeface="Times New Roman" panose="02020603050405020304" pitchFamily="18" charset="0"/>
+                </a:rPr>
+                <a:t>.</a:t>
+              </a:r>
+              <a:endParaRPr lang="id-ID" sz="2800" kern="100" dirty="0">
+                <a:solidFill>
+                  <a:srgbClr val="94DDDE"/>
+                </a:solidFill>
+                <a:effectLst/>
+                <a:latin typeface="Josefin Sans" pitchFamily="2" charset="0"/>
+                <a:ea typeface="Calibri" panose="020F0502020204030204" pitchFamily="34" charset="0"/>
+                <a:cs typeface="Times New Roman" panose="02020603050405020304" pitchFamily="18" charset="0"/>
+              </a:endParaRPr>
+            </a:p>
+          </p:txBody>
+        </p:sp>
+      </p:grpSp>
+      <p:pic>
+        <p:nvPicPr>
+          <p:cNvPr id="8" name="Picture 7">
+            <a:extLst>
+              <a:ext uri="{FF2B5EF4-FFF2-40B4-BE49-F238E27FC236}">
+                <a16:creationId xmlns:a16="http://schemas.microsoft.com/office/drawing/2014/main" id="{8FBD6FCA-B1C1-ADFD-369E-5A5E566B2960}"/>
+              </a:ext>
+            </a:extLst>
+          </p:cNvPr>
+          <p:cNvPicPr>
+            <a:picLocks noChangeAspect="1"/>
+          </p:cNvPicPr>
+          <p:nvPr/>
+        </p:nvPicPr>
+        <p:blipFill>
+          <a:blip r:embed="rId3" cstate="print">
+            <a:extLst>
+              <a:ext uri="{28A0092B-C50C-407E-A947-70E740481C1C}">
+                <a14:useLocalDpi xmlns:a14="http://schemas.microsoft.com/office/drawing/2010/main" val="0"/>
+              </a:ext>
+            </a:extLst>
+          </a:blip>
+          <a:srcRect/>
+          <a:stretch/>
+        </p:blipFill>
+        <p:spPr>
+          <a:xfrm>
+            <a:off x="10687981" y="2459389"/>
+            <a:ext cx="5328259" cy="5368221"/>
+          </a:xfrm>
+          <a:prstGeom prst="rect">
+            <a:avLst/>
+          </a:prstGeom>
+        </p:spPr>
+      </p:pic>
+    </p:spTree>
+    <p:extLst>
+      <p:ext uri="{BB962C8B-B14F-4D97-AF65-F5344CB8AC3E}">
+        <p14:creationId xmlns:p14="http://schemas.microsoft.com/office/powerpoint/2010/main" val="2991341673"/>
+      </p:ext>
+    </p:extLst>
+  </p:cSld>
+  <p:clrMapOvr>
+    <a:masterClrMapping/>
+  </p:clrMapOvr>
+  <mc:AlternateContent xmlns:mc="http://schemas.openxmlformats.org/markup-compatibility/2006">
+    <mc:Choice xmlns:p159="http://schemas.microsoft.com/office/powerpoint/2015/09/main" Requires="p159">
+      <p:transition xmlns:p14="http://schemas.microsoft.com/office/powerpoint/2010/main" spd="slow" p14:dur="2000">
+        <p159:morph option="byObject"/>
+      </p:transition>
+    </mc:Choice>
+    <mc:Fallback>
+      <p:transition spd="slow">
+        <p:fade/>
+      </p:transition>
+    </mc:Fallback>
+  </mc:AlternateContent>
+</p:sld>
+</file>
+
+<file path=ppt/slides/slide9.xml><?xml version="1.0" encoding="utf-8"?>
+<p:sld xmlns:a="http://schemas.openxmlformats.org/drawingml/2006/main" xmlns:r="http://schemas.openxmlformats.org/officeDocument/2006/relationships" xmlns:p="http://schemas.openxmlformats.org/presentationml/2006/main">
+  <p:cSld>
+    <p:bg>
+      <p:bgPr>
+        <a:solidFill>
+          <a:srgbClr val="2B4B82"/>
+        </a:solidFill>
+        <a:effectLst/>
+      </p:bgPr>
+    </p:bg>
+    <p:spTree>
+      <p:nvGrpSpPr>
         <p:cNvPr id="1" name=""/>
         <p:cNvGrpSpPr/>
         <p:nvPr/>
@@ -12995,273 +14512,6 @@
         </p:spPr>
       </p:pic>
     </p:spTree>
-  </p:cSld>
-  <p:clrMapOvr>
-    <a:masterClrMapping/>
-  </p:clrMapOvr>
-  <mc:AlternateContent xmlns:mc="http://schemas.openxmlformats.org/markup-compatibility/2006" xmlns:p159="http://schemas.microsoft.com/office/powerpoint/2015/09/main">
-    <mc:Choice Requires="p159">
-      <p:transition xmlns:p14="http://schemas.microsoft.com/office/powerpoint/2010/main" spd="slow" p14:dur="2000">
-        <p159:morph option="byObject"/>
-      </p:transition>
-    </mc:Choice>
-    <mc:Fallback xmlns="">
-      <p:transition spd="slow">
-        <p:fade/>
-      </p:transition>
-    </mc:Fallback>
-  </mc:AlternateContent>
-</p:sld>
-</file>
-
-<file path=ppt/slides/slide9.xml><?xml version="1.0" encoding="utf-8"?>
-<p:sld xmlns:a="http://schemas.openxmlformats.org/drawingml/2006/main" xmlns:r="http://schemas.openxmlformats.org/officeDocument/2006/relationships" xmlns:p="http://schemas.openxmlformats.org/presentationml/2006/main">
-  <p:cSld>
-    <p:bg>
-      <p:bgPr>
-        <a:solidFill>
-          <a:srgbClr val="2B4B82"/>
-        </a:solidFill>
-        <a:effectLst/>
-      </p:bgPr>
-    </p:bg>
-    <p:spTree>
-      <p:nvGrpSpPr>
-        <p:cNvPr id="1" name="">
-          <a:extLst>
-            <a:ext uri="{FF2B5EF4-FFF2-40B4-BE49-F238E27FC236}">
-              <a16:creationId xmlns:a16="http://schemas.microsoft.com/office/drawing/2014/main" id="{C457255F-02B5-B499-2391-B451EC9A83A1}"/>
-            </a:ext>
-          </a:extLst>
-        </p:cNvPr>
-        <p:cNvGrpSpPr/>
-        <p:nvPr/>
-      </p:nvGrpSpPr>
-      <p:grpSpPr>
-        <a:xfrm>
-          <a:off x="0" y="0"/>
-          <a:ext cx="0" cy="0"/>
-          <a:chOff x="0" y="0"/>
-          <a:chExt cx="0" cy="0"/>
-        </a:xfrm>
-      </p:grpSpPr>
-      <p:grpSp>
-        <p:nvGrpSpPr>
-          <p:cNvPr id="2" name="Group 2">
-            <a:extLst>
-              <a:ext uri="{FF2B5EF4-FFF2-40B4-BE49-F238E27FC236}">
-                <a16:creationId xmlns:a16="http://schemas.microsoft.com/office/drawing/2014/main" id="{B13CB768-D8DC-6984-09CD-93775B44B526}"/>
-              </a:ext>
-            </a:extLst>
-          </p:cNvPr>
-          <p:cNvGrpSpPr/>
-          <p:nvPr/>
-        </p:nvGrpSpPr>
-        <p:grpSpPr>
-          <a:xfrm>
-            <a:off x="1028699" y="1731585"/>
-            <a:ext cx="7658101" cy="7197011"/>
-            <a:chOff x="-1" y="66675"/>
-            <a:chExt cx="10210800" cy="7404838"/>
-          </a:xfrm>
-        </p:grpSpPr>
-        <p:sp>
-          <p:nvSpPr>
-            <p:cNvPr id="3" name="TextBox 3">
-              <a:extLst>
-                <a:ext uri="{FF2B5EF4-FFF2-40B4-BE49-F238E27FC236}">
-                  <a16:creationId xmlns:a16="http://schemas.microsoft.com/office/drawing/2014/main" id="{652705A5-52BF-939F-34CC-A07368E7CF5C}"/>
-                </a:ext>
-              </a:extLst>
-            </p:cNvPr>
-            <p:cNvSpPr txBox="1"/>
-            <p:nvPr/>
-          </p:nvSpPr>
-          <p:spPr>
-            <a:xfrm>
-              <a:off x="0" y="66675"/>
-              <a:ext cx="10210799" cy="1800368"/>
-            </a:xfrm>
-            <a:prstGeom prst="rect">
-              <a:avLst/>
-            </a:prstGeom>
-          </p:spPr>
-          <p:txBody>
-            <a:bodyPr wrap="square" lIns="0" tIns="0" rIns="0" bIns="0" rtlCol="0" anchor="t">
-              <a:spAutoFit/>
-            </a:bodyPr>
-            <a:lstStyle/>
-            <a:p>
-              <a:pPr algn="just">
-                <a:lnSpc>
-                  <a:spcPts val="6720"/>
-                </a:lnSpc>
-              </a:pPr>
-              <a:r>
-                <a:rPr lang="id-ID" sz="6400" b="1" dirty="0">
-                  <a:solidFill>
-                    <a:srgbClr val="F7B4A7"/>
-                  </a:solidFill>
-                  <a:latin typeface="Josefin Sans Bold"/>
-                  <a:ea typeface="Josefin Sans Bold"/>
-                  <a:cs typeface="Josefin Sans Bold"/>
-                  <a:sym typeface="Josefin Sans Bold"/>
-                </a:rPr>
-                <a:t>Pengertian Pengadaan Barang</a:t>
-              </a:r>
-              <a:endParaRPr lang="en-US" sz="6400" b="1" dirty="0">
-                <a:solidFill>
-                  <a:srgbClr val="F7B4A7"/>
-                </a:solidFill>
-                <a:latin typeface="Josefin Sans Bold"/>
-                <a:ea typeface="Josefin Sans Bold"/>
-                <a:cs typeface="Josefin Sans Bold"/>
-                <a:sym typeface="Josefin Sans Bold"/>
-              </a:endParaRPr>
-            </a:p>
-          </p:txBody>
-        </p:sp>
-        <p:sp>
-          <p:nvSpPr>
-            <p:cNvPr id="5" name="TextBox 5">
-              <a:extLst>
-                <a:ext uri="{FF2B5EF4-FFF2-40B4-BE49-F238E27FC236}">
-                  <a16:creationId xmlns:a16="http://schemas.microsoft.com/office/drawing/2014/main" id="{886ABE53-9EF4-257A-FA07-D3FB11F201AD}"/>
-                </a:ext>
-              </a:extLst>
-            </p:cNvPr>
-            <p:cNvSpPr txBox="1"/>
-            <p:nvPr/>
-          </p:nvSpPr>
-          <p:spPr>
-            <a:xfrm>
-              <a:off x="-1" y="2602801"/>
-              <a:ext cx="10210800" cy="4868712"/>
-            </a:xfrm>
-            <a:prstGeom prst="rect">
-              <a:avLst/>
-            </a:prstGeom>
-          </p:spPr>
-          <p:txBody>
-            <a:bodyPr wrap="square" lIns="0" tIns="0" rIns="0" bIns="0" rtlCol="0" anchor="t">
-              <a:spAutoFit/>
-            </a:bodyPr>
-            <a:lstStyle/>
-            <a:p>
-              <a:pPr algn="just">
-                <a:lnSpc>
-                  <a:spcPts val="4060"/>
-                </a:lnSpc>
-              </a:pPr>
-              <a:r>
-                <a:rPr lang="id-ID" sz="3200" dirty="0">
-                  <a:solidFill>
-                    <a:srgbClr val="94DDDE"/>
-                  </a:solidFill>
-                  <a:latin typeface="Josefin Sans" panose="020B0604020202020204" charset="0"/>
-                </a:rPr>
-                <a:t>Menurut Putri dan Sembiring (2021)</a:t>
-              </a:r>
-              <a:endParaRPr lang="en-US" sz="3200" dirty="0">
-                <a:solidFill>
-                  <a:srgbClr val="94DDDE"/>
-                </a:solidFill>
-                <a:latin typeface="Josefin Sans" panose="020B0604020202020204" charset="0"/>
-              </a:endParaRPr>
-            </a:p>
-            <a:p>
-              <a:pPr algn="just">
-                <a:lnSpc>
-                  <a:spcPts val="4060"/>
-                </a:lnSpc>
-              </a:pPr>
-              <a:endParaRPr lang="en-US" sz="3200" dirty="0">
-                <a:solidFill>
-                  <a:srgbClr val="94DDDE"/>
-                </a:solidFill>
-                <a:latin typeface="Josefin Sans" panose="020B0604020202020204" charset="0"/>
-                <a:ea typeface="Josefin Sans"/>
-                <a:cs typeface="Josefin Sans"/>
-                <a:sym typeface="Josefin Sans"/>
-              </a:endParaRPr>
-            </a:p>
-            <a:p>
-              <a:pPr algn="just">
-                <a:lnSpc>
-                  <a:spcPts val="4060"/>
-                </a:lnSpc>
-              </a:pPr>
-              <a:r>
-                <a:rPr lang="id-ID" sz="3200" dirty="0">
-                  <a:solidFill>
-                    <a:srgbClr val="94DDDE"/>
-                  </a:solidFill>
-                </a:rPr>
-                <a:t>Pengadaan barang adalah proses pembelian atau penyediaan barang dan jasa yang dibutuhkan oleh suatu organisasi. Proses ini melibatkan identifikasi kebutuhan, pemilihan pemasok, dan pengelolaan pengiriman barang dengan tujuan efisiensi dan penghematan biaya</a:t>
-              </a:r>
-              <a:r>
-                <a:rPr lang="en-US" sz="3200" dirty="0">
-                  <a:solidFill>
-                    <a:srgbClr val="94DDDE"/>
-                  </a:solidFill>
-                </a:rPr>
-                <a:t>.</a:t>
-              </a:r>
-              <a:endParaRPr lang="en-US" sz="2900" dirty="0">
-                <a:solidFill>
-                  <a:srgbClr val="94DDDE"/>
-                </a:solidFill>
-                <a:latin typeface="Josefin Sans" panose="020B0604020202020204" charset="0"/>
-                <a:ea typeface="Josefin Sans"/>
-                <a:cs typeface="Josefin Sans"/>
-                <a:sym typeface="Josefin Sans"/>
-              </a:endParaRPr>
-            </a:p>
-          </p:txBody>
-        </p:sp>
-      </p:grpSp>
-      <p:pic>
-        <p:nvPicPr>
-          <p:cNvPr id="6" name="Graphic 5" descr="Shopping cart with solid fill">
-            <a:extLst>
-              <a:ext uri="{FF2B5EF4-FFF2-40B4-BE49-F238E27FC236}">
-                <a16:creationId xmlns:a16="http://schemas.microsoft.com/office/drawing/2014/main" id="{FFC7DE48-E26B-40D0-2D77-A60FCA757F3A}"/>
-              </a:ext>
-            </a:extLst>
-          </p:cNvPr>
-          <p:cNvPicPr>
-            <a:picLocks noChangeAspect="1"/>
-          </p:cNvPicPr>
-          <p:nvPr/>
-        </p:nvPicPr>
-        <p:blipFill>
-          <a:blip r:embed="rId2">
-            <a:extLst>
-              <a:ext uri="{96DAC541-7B7A-43D3-8B79-37D633B846F1}">
-                <asvg:svgBlip xmlns:asvg="http://schemas.microsoft.com/office/drawing/2016/SVG/main" r:embed="rId3"/>
-              </a:ext>
-            </a:extLst>
-          </a:blip>
-          <a:stretch>
-            <a:fillRect/>
-          </a:stretch>
-        </p:blipFill>
-        <p:spPr>
-          <a:xfrm>
-            <a:off x="11125200" y="2588108"/>
-            <a:ext cx="5110784" cy="5110784"/>
-          </a:xfrm>
-          <a:prstGeom prst="rect">
-            <a:avLst/>
-          </a:prstGeom>
-        </p:spPr>
-      </p:pic>
-    </p:spTree>
-    <p:extLst>
-      <p:ext uri="{BB962C8B-B14F-4D97-AF65-F5344CB8AC3E}">
-        <p14:creationId xmlns:p14="http://schemas.microsoft.com/office/powerpoint/2010/main" val="293611491"/>
-      </p:ext>
-    </p:extLst>
   </p:cSld>
   <p:clrMapOvr>
     <a:masterClrMapping/>
